--- a/Topic_E/Exam_Practice/TE-L07_Speaking_Workshop_National_Festivals_and_Traditions.pptx
+++ b/Topic_E/Exam_Practice/TE-L07_Speaking_Workshop_National_Festivals_and_Traditions.pptx
@@ -615,7 +615,11 @@
           <a:lstStyle/>
           <a:p>
             <a:r>
-              <a:rPr lang="en-US" dirty="0"/>
+              <a:rPr lang="ar-SA" dirty="0">
+                <a:latin typeface="Amiri" pitchFamily="2" charset="-78"/>
+                <a:ea typeface="Amiri" pitchFamily="2" charset="-78"/>
+                <a:cs typeface="Amiri" pitchFamily="2" charset="-78"/>
+              </a:rPr>
               <a:t>ROLE PLAY C (Develop) — a school podcast.
 SET-UP IN THE BREAKOUT ROOM: A = examiner (reads the left column ONLY — the questions, in order), B = candidate (sees the task column; Core may use the help column), C = observer (ticks the feedback checklist). 1 minute preparation, about 3 minutes speaking, 1 minute feedback, then rotate.
 Task ! is the unexpected question: in the exam the candidate has not seen it — the examiner should read it without warning.
@@ -707,7 +711,11 @@
           <a:lstStyle/>
           <a:p>
             <a:r>
-              <a:rPr lang="en-US" dirty="0"/>
+              <a:rPr lang="ar-SA" dirty="0">
+                <a:latin typeface="Amiri" pitchFamily="2" charset="-78"/>
+                <a:ea typeface="Amiri" pitchFamily="2" charset="-78"/>
+                <a:cs typeface="Amiri" pitchFamily="2" charset="-78"/>
+              </a:rPr>
               <a:t>ROLE PLAY D (Stretch) — a youth council meeting.
 SET-UP IN THE BREAKOUT ROOM: A = examiner (reads the left column ONLY — the questions, in order), B = candidate (sees the task column; Core may use the help column), C = observer (ticks the feedback checklist). 1 minute preparation, about 3 minutes speaking, 1 minute feedback, then rotate.
 Task ! is the unexpected question: in the exam the candidate has not seen it — the examiner should read it without warning.
@@ -1243,7 +1251,11 @@
           <a:lstStyle/>
           <a:p>
             <a:r>
-              <a:rPr lang="en-US" dirty="0"/>
+              <a:rPr lang="ar-SA" dirty="0">
+                <a:latin typeface="Amiri" pitchFamily="2" charset="-78"/>
+                <a:ea typeface="Amiri" pitchFamily="2" charset="-78"/>
+                <a:cs typeface="Amiri" pitchFamily="2" charset="-78"/>
+              </a:rPr>
               <a:t>TOPIC CONVERSATION — Core. Examiner asks the questions in order and may add “لِمَاذَا؟ / هَلْ يُمْكِنُ أَنْ تَشْرَحَ أَكْثَرَ؟” to push for more. Candidate aims for one full sentence per question.
 </a:t>
             </a:r>
@@ -1332,7 +1344,11 @@
           <a:lstStyle/>
           <a:p>
             <a:r>
-              <a:rPr lang="en-US" dirty="0"/>
+              <a:rPr lang="ar-SA" dirty="0">
+                <a:latin typeface="Amiri" pitchFamily="2" charset="-78"/>
+                <a:ea typeface="Amiri" pitchFamily="2" charset="-78"/>
+                <a:cs typeface="Amiri" pitchFamily="2" charset="-78"/>
+              </a:rPr>
               <a:t>TOPIC CONVERSATION — Develop. Examiner asks the questions in order and may add “لِمَاذَا؟ / هَلْ يُمْكِنُ أَنْ تَشْرَحَ أَكْثَرَ؟” to push for more. Candidate aims for two or three sentences, with a passive, a comparison and two time frames.
 </a:t>
             </a:r>
@@ -1421,7 +1437,11 @@
           <a:lstStyle/>
           <a:p>
             <a:r>
-              <a:rPr lang="en-US" dirty="0"/>
+              <a:rPr lang="ar-SA" dirty="0">
+                <a:latin typeface="Amiri" pitchFamily="2" charset="-78"/>
+                <a:ea typeface="Amiri" pitchFamily="2" charset="-78"/>
+                <a:cs typeface="Amiri" pitchFamily="2" charset="-78"/>
+              </a:rPr>
               <a:t>TOPIC CONVERSATION — Stretch. Examiner asks the questions in order and may add “لِمَاذَا؟ / هَلْ يُمْكِنُ أَنْ تَشْرَحَ أَكْثَرَ؟” to push for more. Candidate aims for a developed answer: opinion, balance, concession and a conditional.
 </a:t>
             </a:r>
@@ -1510,7 +1530,11 @@
           <a:lstStyle/>
           <a:p>
             <a:r>
-              <a:rPr lang="en-US" dirty="0"/>
+              <a:rPr lang="ar-SA" dirty="0">
+                <a:latin typeface="Amiri" pitchFamily="2" charset="-78"/>
+                <a:ea typeface="Amiri" pitchFamily="2" charset="-78"/>
+                <a:cs typeface="Amiri" pitchFamily="2" charset="-78"/>
+              </a:rPr>
               <a:t>WELCOME (1 min) — while students join.
 • Greet each student by name as they arrive: السَّلَامُ عَلَيْكُمْ. Take the register (Pastoral Tracker: attendance 0/1).
 • 2-MINUTE CHECK-IN (SEND training): a private chat to any student who seemed unsettled last lesson — “Are you okay today? 👍 / 👎”.
@@ -2224,7 +2248,11 @@
           <a:lstStyle/>
           <a:p>
             <a:r>
-              <a:rPr lang="en-US" dirty="0"/>
+              <a:rPr lang="ar-SA" dirty="0">
+                <a:latin typeface="Amiri" pitchFamily="2" charset="-78"/>
+                <a:ea typeface="Amiri" pitchFamily="2" charset="-78"/>
+                <a:cs typeface="Amiri" pitchFamily="2" charset="-78"/>
+              </a:rPr>
               <a:t>TEACH (3 min). Role play = precise and complete; conversation = develop. Choral repetition of the repair phrases. To a girl: تُعِيدِي.</a:t>
             </a:r>
             <a:endParaRPr lang="en-US" dirty="0"/>
@@ -2312,7 +2340,11 @@
           <a:lstStyle/>
           <a:p>
             <a:r>
-              <a:rPr lang="en-US" dirty="0"/>
+              <a:rPr lang="ar-SA" dirty="0">
+                <a:latin typeface="Amiri" pitchFamily="2" charset="-78"/>
+                <a:ea typeface="Amiri" pitchFamily="2" charset="-78"/>
+                <a:cs typeface="Amiri" pitchFamily="2" charset="-78"/>
+              </a:rPr>
               <a:t>LANGUAGE BANK (2 min) — the passive hides who does it: نَرْفَعُ الأَعْلَامَ → تُرْفَعُ الأَعْلَامُ. Pattern: yufʿalu / tufʿalu (present), fuʿila (past). With a preposition the verb stays masculine: يُحْتَفَلُ بِاليَوْمِ الوَطَنِيِّ · يُحْتَفَلُ بِهَا.</a:t>
             </a:r>
             <a:endParaRPr lang="en-US" dirty="0"/>
@@ -2400,7 +2432,11 @@
           <a:lstStyle/>
           <a:p>
             <a:r>
-              <a:rPr lang="en-US" dirty="0"/>
+              <a:rPr lang="ar-SA" dirty="0">
+                <a:latin typeface="Amiri" pitchFamily="2" charset="-78"/>
+                <a:ea typeface="Amiri" pitchFamily="2" charset="-78"/>
+                <a:cs typeface="Amiri" pitchFamily="2" charset="-78"/>
+              </a:rPr>
               <a:t>LANGUAGE BANK (2 min) — afʿal min (أَكْبَرُ مِنْ · أَقْدَمُ مِنْ) does not change for gender; for longer ideas use أَكْثَرُ + noun (acc.): أَكْثَرُ حَمَاسًا · أَكْثَرُ تَنْظِيمًا. Time frames: احْتَفَلْنَا (last year) · نَحْتَفِلُ (every year) · سَنَحْتَفِلُ (next year).</a:t>
             </a:r>
             <a:endParaRPr lang="en-US" dirty="0"/>
@@ -2576,7 +2612,11 @@
           <a:lstStyle/>
           <a:p>
             <a:r>
-              <a:rPr lang="en-US" dirty="0"/>
+              <a:rPr lang="ar-SA" dirty="0">
+                <a:latin typeface="Amiri" pitchFamily="2" charset="-78"/>
+                <a:ea typeface="Amiri" pitchFamily="2" charset="-78"/>
+                <a:cs typeface="Amiri" pitchFamily="2" charset="-78"/>
+              </a:rPr>
               <a:t>ROLE PLAY A (Core) — a tourist office in Muscat.
 SET-UP IN THE BREAKOUT ROOM: A = examiner (reads the left column ONLY — the questions, in order), B = candidate (sees the task column; Core may use the help column), C = observer (ticks the feedback checklist). 1 minute preparation, about 3 minutes speaking, 1 minute feedback, then rotate.
 Task ! is the unexpected question: in the exam the candidate has not seen it — the examiner should read it without warning.
@@ -2668,7 +2708,11 @@
           <a:lstStyle/>
           <a:p>
             <a:r>
-              <a:rPr lang="en-US" dirty="0"/>
+              <a:rPr lang="ar-SA" dirty="0">
+                <a:latin typeface="Amiri" pitchFamily="2" charset="-78"/>
+                <a:ea typeface="Amiri" pitchFamily="2" charset="-78"/>
+                <a:cs typeface="Amiri" pitchFamily="2" charset="-78"/>
+              </a:rPr>
               <a:t>ROLE PLAY B (Core+) — a British street in November.
 SET-UP IN THE BREAKOUT ROOM: A = examiner (reads the left column ONLY — the questions, in order), B = candidate (sees the task column; Core may use the help column), C = observer (ticks the feedback checklist). 1 minute preparation, about 3 minutes speaking, 1 minute feedback, then rotate.
 Task ! is the unexpected question: in the exam the candidate has not seen it — the examiner should read it without warning.
@@ -3156,6 +3200,7 @@
                   <a:srgbClr val="D4AF37"/>
                 </a:solidFill>
                 <a:latin typeface="Amiri" pitchFamily="2" charset="-78"/>
+                <a:ea typeface="Amiri" pitchFamily="2" charset="-78"/>
                 <a:cs typeface="Amiri" pitchFamily="2" charset="-78"/>
               </a:rPr>
               <a:t>م</a:t>
@@ -3362,6 +3407,7 @@
                   <a:srgbClr val="D4AF37"/>
                 </a:solidFill>
                 <a:latin typeface="Amiri" pitchFamily="2" charset="-78"/>
+                <a:ea typeface="Amiri" pitchFamily="2" charset="-78"/>
                 <a:cs typeface="Amiri" pitchFamily="2" charset="-78"/>
               </a:rPr>
               <a:t>وَرْشَةُ التَّحَدُّثِ — الأَعْيَادُ الوَطَنِيَّةُ وَالتَّقَالِيدُ</a:t>
@@ -3413,6 +3459,7 @@
                   <a:srgbClr val="C6D2E6"/>
                 </a:solidFill>
                 <a:latin typeface="Amiri" pitchFamily="2" charset="-78"/>
+                <a:ea typeface="Amiri" pitchFamily="2" charset="-78"/>
                 <a:cs typeface="Amiri" pitchFamily="2" charset="-78"/>
               </a:rPr>
               <a:t>تُرْفَعُ الأَعْلَامُ</a:t>
@@ -3439,6 +3486,7 @@
                   <a:srgbClr val="C6D2E6"/>
                 </a:solidFill>
                 <a:latin typeface="Amiri" pitchFamily="2" charset="-78"/>
+                <a:ea typeface="Amiri" pitchFamily="2" charset="-78"/>
                 <a:cs typeface="Amiri" pitchFamily="2" charset="-78"/>
               </a:rPr>
               <a:t>تُطْلَقُ الأَلْعَابُ النَّارِيَّةُ</a:t>
@@ -3465,6 +3513,7 @@
                   <a:srgbClr val="C6D2E6"/>
                 </a:solidFill>
                 <a:latin typeface="Amiri" pitchFamily="2" charset="-78"/>
+                <a:ea typeface="Amiri" pitchFamily="2" charset="-78"/>
                 <a:cs typeface="Amiri" pitchFamily="2" charset="-78"/>
               </a:rPr>
               <a:t>أَكْبَرُ مِنْ</a:t>
@@ -3491,6 +3540,7 @@
                   <a:srgbClr val="C6D2E6"/>
                 </a:solidFill>
                 <a:latin typeface="Amiri" pitchFamily="2" charset="-78"/>
+                <a:ea typeface="Amiri" pitchFamily="2" charset="-78"/>
                 <a:cs typeface="Amiri" pitchFamily="2" charset="-78"/>
               </a:rPr>
               <a:t>أَكْثَرُ حَمَاسًا مِنْ</a:t>
@@ -3923,6 +3973,7 @@
                   <a:srgbClr val="D4AF37"/>
                 </a:solidFill>
                 <a:latin typeface="Amiri" pitchFamily="2" charset="-78"/>
+                <a:ea typeface="Amiri" pitchFamily="2" charset="-78"/>
                 <a:cs typeface="Amiri" pitchFamily="2" charset="-78"/>
               </a:rPr>
               <a:t>م</a:t>
@@ -4243,6 +4294,7 @@
                   <a:srgbClr val="8A6D1E"/>
                 </a:solidFill>
                 <a:latin typeface="Amiri" pitchFamily="2" charset="-78"/>
+                <a:ea typeface="Amiri" pitchFamily="2" charset="-78"/>
                 <a:cs typeface="Amiri" pitchFamily="2" charset="-78"/>
               </a:rPr>
               <a:t>شَمُّ النَّسِيمِ فِي مِصْرَ</a:t>
@@ -4523,6 +4575,7 @@
                   <a:srgbClr val="1B3B6F"/>
                 </a:solidFill>
                 <a:latin typeface="Amiri" pitchFamily="2" charset="-78"/>
+                <a:ea typeface="Amiri" pitchFamily="2" charset="-78"/>
                 <a:cs typeface="Amiri" pitchFamily="2" charset="-78"/>
               </a:rPr>
               <a:t>هُوَ عِيدُ … يُحْتَفَلُ بِهِ … مُنْذُ …</a:t>
@@ -4599,6 +4652,7 @@
                   <a:srgbClr val="1B3B6F"/>
                 </a:solidFill>
                 <a:latin typeface="Amiri" pitchFamily="2" charset="-78"/>
+                <a:ea typeface="Amiri" pitchFamily="2" charset="-78"/>
                 <a:cs typeface="Amiri" pitchFamily="2" charset="-78"/>
               </a:rPr>
               <a:t>مَا هُوَ شَمُّ النَّسِيمِ؟</a:t>
@@ -4702,6 +4756,7 @@
                   <a:srgbClr val="1B3B6F"/>
                 </a:solidFill>
                 <a:latin typeface="Amiri" pitchFamily="2" charset="-78"/>
+                <a:ea typeface="Amiri" pitchFamily="2" charset="-78"/>
                 <a:cs typeface="Amiri" pitchFamily="2" charset="-78"/>
               </a:rPr>
               <a:t>خَرَجْنَا … ثُمَّ لَوَّنَّا … وَأَكَلْنَا …</a:t>
@@ -4778,6 +4833,7 @@
                   <a:srgbClr val="1B3B6F"/>
                 </a:solidFill>
                 <a:latin typeface="Amiri" pitchFamily="2" charset="-78"/>
+                <a:ea typeface="Amiri" pitchFamily="2" charset="-78"/>
                 <a:cs typeface="Amiri" pitchFamily="2" charset="-78"/>
               </a:rPr>
               <a:t>كَيْفَ احْتَفَلْتَ بِهِ هٰذِهِ السَّنَةَ؟</a:t>
@@ -4881,6 +4937,7 @@
                   <a:srgbClr val="1B3B6F"/>
                 </a:solidFill>
                 <a:latin typeface="Amiri" pitchFamily="2" charset="-78"/>
+                <a:ea typeface="Amiri" pitchFamily="2" charset="-78"/>
                 <a:cs typeface="Amiri" pitchFamily="2" charset="-78"/>
               </a:rPr>
               <a:t>يُشْبِهُ … فِي … ، لٰكِنَّهُ أَكْثَرُ … مِنْ …</a:t>
@@ -4957,6 +5014,7 @@
                   <a:srgbClr val="1B3B6F"/>
                 </a:solidFill>
                 <a:latin typeface="Amiri" pitchFamily="2" charset="-78"/>
+                <a:ea typeface="Amiri" pitchFamily="2" charset="-78"/>
                 <a:cs typeface="Amiri" pitchFamily="2" charset="-78"/>
               </a:rPr>
               <a:t>هَلْ يُشْبِهُ أَيَّ احْتِفَالٍ فِي بَرِيطَانْيَا؟</a:t>
@@ -5060,6 +5118,7 @@
                   <a:srgbClr val="1B3B6F"/>
                 </a:solidFill>
                 <a:latin typeface="Amiri" pitchFamily="2" charset="-78"/>
+                <a:ea typeface="Amiri" pitchFamily="2" charset="-78"/>
                 <a:cs typeface="Amiri" pitchFamily="2" charset="-78"/>
               </a:rPr>
               <a:t>أَعْجَبَنِي … لِأَنَّ … ؛ مَثَلًا …</a:t>
@@ -5136,6 +5195,7 @@
                   <a:srgbClr val="1B3B6F"/>
                 </a:solidFill>
                 <a:latin typeface="Amiri" pitchFamily="2" charset="-78"/>
+                <a:ea typeface="Amiri" pitchFamily="2" charset="-78"/>
                 <a:cs typeface="Amiri" pitchFamily="2" charset="-78"/>
               </a:rPr>
               <a:t>مَا الشَّيْءُ الَّذِي أَعْجَبَكَ أَكْثَرَ؟</a:t>
@@ -5239,6 +5299,7 @@
                   <a:srgbClr val="1B3B6F"/>
                 </a:solidFill>
                 <a:latin typeface="Amiri" pitchFamily="2" charset="-78"/>
+                <a:ea typeface="Amiri" pitchFamily="2" charset="-78"/>
                 <a:cs typeface="Amiri" pitchFamily="2" charset="-78"/>
               </a:rPr>
               <a:t>إِذَا … فَسَنَخْرُجُ …</a:t>
@@ -5315,6 +5376,7 @@
                   <a:srgbClr val="1B3B6F"/>
                 </a:solidFill>
                 <a:latin typeface="Amiri" pitchFamily="2" charset="-78"/>
+                <a:ea typeface="Amiri" pitchFamily="2" charset="-78"/>
                 <a:cs typeface="Amiri" pitchFamily="2" charset="-78"/>
               </a:rPr>
               <a:t>هَلْ سَتَحْتَفِلُ بِهِ فِي بَرِيطَانْيَا؟</a:t>
@@ -5524,6 +5586,7 @@
                   <a:srgbClr val="D4AF37"/>
                 </a:solidFill>
                 <a:latin typeface="Amiri" pitchFamily="2" charset="-78"/>
+                <a:ea typeface="Amiri" pitchFamily="2" charset="-78"/>
                 <a:cs typeface="Amiri" pitchFamily="2" charset="-78"/>
               </a:rPr>
               <a:t>م</a:t>
@@ -5844,6 +5907,7 @@
                   <a:srgbClr val="8A6D1E"/>
                 </a:solidFill>
                 <a:latin typeface="Amiri" pitchFamily="2" charset="-78"/>
+                <a:ea typeface="Amiri" pitchFamily="2" charset="-78"/>
                 <a:cs typeface="Amiri" pitchFamily="2" charset="-78"/>
               </a:rPr>
               <a:t>هَلْ تُمَوِّلُ المَدِينَةُ احْتِفَالًا كَبِيرًا؟</a:t>
@@ -6124,6 +6188,7 @@
                   <a:srgbClr val="1B3B6F"/>
                 </a:solidFill>
                 <a:latin typeface="Amiri" pitchFamily="2" charset="-78"/>
+                <a:ea typeface="Amiri" pitchFamily="2" charset="-78"/>
                 <a:cs typeface="Amiri" pitchFamily="2" charset="-78"/>
               </a:rPr>
               <a:t>مِنْ نَاحِيَةٍ … وَمِنْ نَاحِيَةٍ أُخْرَى …</a:t>
@@ -6203,6 +6268,7 @@
                   <a:srgbClr val="1B3B6F"/>
                 </a:solidFill>
                 <a:latin typeface="Amiri" pitchFamily="2" charset="-78"/>
+                <a:ea typeface="Amiri" pitchFamily="2" charset="-78"/>
                 <a:cs typeface="Amiri" pitchFamily="2" charset="-78"/>
               </a:rPr>
               <a:t>يُقْتَرَحُ أَنْ يُنْفَقَ مِلْيُونُ جُنَيْهٍ عَلَى احْتِفَالٍ وَطَنِيٍّ. مَا رَأْيُكَ؟</a:t>
@@ -6306,6 +6372,7 @@
                   <a:srgbClr val="1B3B6F"/>
                 </a:solidFill>
                 <a:latin typeface="Amiri" pitchFamily="2" charset="-78"/>
+                <a:ea typeface="Amiri" pitchFamily="2" charset="-78"/>
                 <a:cs typeface="Amiri" pitchFamily="2" charset="-78"/>
               </a:rPr>
               <a:t>نُظِّمَ … وَحَضَرَهُ … غَيْرَ أَنَّ …</a:t>
@@ -6382,6 +6449,7 @@
                   <a:srgbClr val="1B3B6F"/>
                 </a:solidFill>
                 <a:latin typeface="Amiri" pitchFamily="2" charset="-78"/>
+                <a:ea typeface="Amiri" pitchFamily="2" charset="-78"/>
                 <a:cs typeface="Amiri" pitchFamily="2" charset="-78"/>
               </a:rPr>
               <a:t>كَيْفَ كَانَ الاحْتِفَالُ فِي السَّنَةِ المَاضِيَةِ؟</a:t>
@@ -6485,6 +6553,7 @@
                   <a:srgbClr val="1B3B6F"/>
                 </a:solidFill>
                 <a:latin typeface="Amiri" pitchFamily="2" charset="-78"/>
+                <a:ea typeface="Amiri" pitchFamily="2" charset="-78"/>
                 <a:cs typeface="Amiri" pitchFamily="2" charset="-78"/>
               </a:rPr>
               <a:t>أَقْتَرِحُ أَنْ … لِأَنَّ ذٰلِكَ أَقَلُّ … وَأَكْثَرُ …</a:t>
@@ -6561,6 +6630,7 @@
                   <a:srgbClr val="1B3B6F"/>
                 </a:solidFill>
                 <a:latin typeface="Amiri" pitchFamily="2" charset="-78"/>
+                <a:ea typeface="Amiri" pitchFamily="2" charset="-78"/>
                 <a:cs typeface="Amiri" pitchFamily="2" charset="-78"/>
               </a:rPr>
               <a:t>إِذَنْ مَاذَا تَقْتَرِحُ؟</a:t>
@@ -6664,6 +6734,7 @@
                   <a:srgbClr val="1B3B6F"/>
                 </a:solidFill>
                 <a:latin typeface="Amiri" pitchFamily="2" charset="-78"/>
+                <a:ea typeface="Amiri" pitchFamily="2" charset="-78"/>
                 <a:cs typeface="Amiri" pitchFamily="2" charset="-78"/>
               </a:rPr>
               <a:t>صَحِيحٌ أَنَّ … غَيْرَ أَنَّ …</a:t>
@@ -6740,6 +6811,7 @@
                   <a:srgbClr val="1B3B6F"/>
                 </a:solidFill>
                 <a:latin typeface="Amiri" pitchFamily="2" charset="-78"/>
+                <a:ea typeface="Amiri" pitchFamily="2" charset="-78"/>
                 <a:cs typeface="Amiri" pitchFamily="2" charset="-78"/>
               </a:rPr>
               <a:t>لٰكِنَّ الاحْتِفَالَ الكَبِيرَ يَجْذِبُ السُّيَّاحَ.</a:t>
@@ -6843,6 +6915,7 @@
                   <a:srgbClr val="1B3B6F"/>
                 </a:solidFill>
                 <a:latin typeface="Amiri" pitchFamily="2" charset="-78"/>
+                <a:ea typeface="Amiri" pitchFamily="2" charset="-78"/>
                 <a:cs typeface="Amiri" pitchFamily="2" charset="-78"/>
               </a:rPr>
               <a:t>لَوْ كُنْتُ …، لَحَوَّلْتُ …</a:t>
@@ -6919,6 +6992,7 @@
                   <a:srgbClr val="1B3B6F"/>
                 </a:solidFill>
                 <a:latin typeface="Amiri" pitchFamily="2" charset="-78"/>
+                <a:ea typeface="Amiri" pitchFamily="2" charset="-78"/>
                 <a:cs typeface="Amiri" pitchFamily="2" charset="-78"/>
               </a:rPr>
               <a:t>لَوْ كُنْتَ رَئِيسَ البَلَدِيَّةِ، كَيْفَ تَحْتَفِلُ؟</a:t>
@@ -7128,6 +7202,7 @@
                   <a:srgbClr val="D4AF37"/>
                 </a:solidFill>
                 <a:latin typeface="Amiri" pitchFamily="2" charset="-78"/>
+                <a:ea typeface="Amiri" pitchFamily="2" charset="-78"/>
                 <a:cs typeface="Amiri" pitchFamily="2" charset="-78"/>
               </a:rPr>
               <a:t>م</a:t>
@@ -7448,6 +7523,7 @@
                   <a:srgbClr val="8A6D1E"/>
                 </a:solidFill>
                 <a:latin typeface="Amiri" pitchFamily="2" charset="-78"/>
+                <a:ea typeface="Amiri" pitchFamily="2" charset="-78"/>
                 <a:cs typeface="Amiri" pitchFamily="2" charset="-78"/>
               </a:rPr>
               <a:t>وَرَقَةُ المُلَاحِظِ</a:t>
@@ -8918,6 +8994,7 @@
                   <a:srgbClr val="D4AF37"/>
                 </a:solidFill>
                 <a:latin typeface="Amiri" pitchFamily="2" charset="-78"/>
+                <a:ea typeface="Amiri" pitchFamily="2" charset="-78"/>
                 <a:cs typeface="Amiri" pitchFamily="2" charset="-78"/>
               </a:rPr>
               <a:t>م</a:t>
@@ -9238,6 +9315,7 @@
                   <a:srgbClr val="8A6D1E"/>
                 </a:solidFill>
                 <a:latin typeface="Amiri" pitchFamily="2" charset="-78"/>
+                <a:ea typeface="Amiri" pitchFamily="2" charset="-78"/>
                 <a:cs typeface="Amiri" pitchFamily="2" charset="-78"/>
               </a:rPr>
               <a:t>نَمُوذَجُ الإِجَابَةِ</a:t>
@@ -9480,6 +9558,7 @@
                   <a:srgbClr val="1B3B6F"/>
                 </a:solidFill>
                 <a:latin typeface="Amiri" pitchFamily="2" charset="-78"/>
+                <a:ea typeface="Amiri" pitchFamily="2" charset="-78"/>
                 <a:cs typeface="Amiri" pitchFamily="2" charset="-78"/>
               </a:rPr>
               <a:t>أَنَا مِنْ بَرِيطَانْيَا، مِنْ مَدِينَةِ لَنْدَنَ.</a:t>
@@ -9556,6 +9635,7 @@
                   <a:srgbClr val="1B3B6F"/>
                 </a:solidFill>
                 <a:latin typeface="Amiri" pitchFamily="2" charset="-78"/>
+                <a:ea typeface="Amiri" pitchFamily="2" charset="-78"/>
                 <a:cs typeface="Amiri" pitchFamily="2" charset="-78"/>
               </a:rPr>
               <a:t>أَهْلًا! مِنْ أَيْنَ أَنْتَ؟</a:t>
@@ -9659,6 +9739,7 @@
                   <a:srgbClr val="1B3B6F"/>
                 </a:solidFill>
                 <a:latin typeface="Amiri" pitchFamily="2" charset="-78"/>
+                <a:ea typeface="Amiri" pitchFamily="2" charset="-78"/>
                 <a:cs typeface="Amiri" pitchFamily="2" charset="-78"/>
               </a:rPr>
               <a:t>رَائِعٌ! مَاذَا يَحْدُثُ فِي اليَوْمِ الوَطَنِيِّ؟</a:t>
@@ -9735,6 +9816,7 @@
                   <a:srgbClr val="1B3B6F"/>
                 </a:solidFill>
                 <a:latin typeface="Amiri" pitchFamily="2" charset="-78"/>
+                <a:ea typeface="Amiri" pitchFamily="2" charset="-78"/>
                 <a:cs typeface="Amiri" pitchFamily="2" charset="-78"/>
               </a:rPr>
               <a:t>جِئْتَ فِي وَقْتٍ جَمِيلٍ! غَدًا اليَوْمُ الوَطَنِيُّ.</a:t>
@@ -9838,6 +9920,7 @@
                   <a:srgbClr val="1B3B6F"/>
                 </a:solidFill>
                 <a:latin typeface="Amiri" pitchFamily="2" charset="-78"/>
+                <a:ea typeface="Amiri" pitchFamily="2" charset="-78"/>
                 <a:cs typeface="Amiri" pitchFamily="2" charset="-78"/>
               </a:rPr>
               <a:t>مَتَى تُطْلَقُ الأَلْعَابُ النَّارِيَّةُ؟</a:t>
@@ -9914,6 +9997,7 @@
                   <a:srgbClr val="1B3B6F"/>
                 </a:solidFill>
                 <a:latin typeface="Amiri" pitchFamily="2" charset="-78"/>
+                <a:ea typeface="Amiri" pitchFamily="2" charset="-78"/>
                 <a:cs typeface="Amiri" pitchFamily="2" charset="-78"/>
               </a:rPr>
               <a:t>تُرْفَعُ الأَعْلَامُ، وَتُطْلَقُ الأَلْعَابُ النَّارِيَّةُ.</a:t>
@@ -10017,6 +10101,7 @@
                   <a:srgbClr val="1B3B6F"/>
                 </a:solidFill>
                 <a:latin typeface="Amiri" pitchFamily="2" charset="-78"/>
+                <a:ea typeface="Amiri" pitchFamily="2" charset="-78"/>
                 <a:cs typeface="Amiri" pitchFamily="2" charset="-78"/>
               </a:rPr>
               <a:t>سَأَذْهَبُ إِلَى الشَّاطِئِ مَعَ أُسْرَتِي.</a:t>
@@ -10093,6 +10178,7 @@
                   <a:srgbClr val="1B3B6F"/>
                 </a:solidFill>
                 <a:latin typeface="Amiri" pitchFamily="2" charset="-78"/>
+                <a:ea typeface="Amiri" pitchFamily="2" charset="-78"/>
                 <a:cs typeface="Amiri" pitchFamily="2" charset="-78"/>
               </a:rPr>
               <a:t>فِي السَّاعَةِ التَّاسِعَةِ عَلَى الشَّاطِئِ.</a:t>
@@ -10196,6 +10282,7 @@
                   <a:srgbClr val="1B3B6F"/>
                 </a:solidFill>
                 <a:latin typeface="Amiri" pitchFamily="2" charset="-78"/>
+                <a:ea typeface="Amiri" pitchFamily="2" charset="-78"/>
                 <a:cs typeface="Amiri" pitchFamily="2" charset="-78"/>
               </a:rPr>
               <a:t>لَيْسَ عِنْدَنَا يَوْمٌ كَبِيرٌ، لٰكِنْ نَحْتَفِلُ بِلَيْلَةِ الأَلْعَابِ النَّارِيَّةِ.</a:t>
@@ -10272,6 +10359,7 @@
                   <a:srgbClr val="1B3B6F"/>
                 </a:solidFill>
                 <a:latin typeface="Amiri" pitchFamily="2" charset="-78"/>
+                <a:ea typeface="Amiri" pitchFamily="2" charset="-78"/>
                 <a:cs typeface="Amiri" pitchFamily="2" charset="-78"/>
               </a:rPr>
               <a:t>هَلْ عِنْدَكُمْ يَوْمٌ وَطَنِيٌّ فِي بَرِيطَانْيَا؟</a:t>
@@ -10481,6 +10569,7 @@
                   <a:srgbClr val="D4AF37"/>
                 </a:solidFill>
                 <a:latin typeface="Amiri" pitchFamily="2" charset="-78"/>
+                <a:ea typeface="Amiri" pitchFamily="2" charset="-78"/>
                 <a:cs typeface="Amiri" pitchFamily="2" charset="-78"/>
               </a:rPr>
               <a:t>م</a:t>
@@ -10801,6 +10890,7 @@
                   <a:srgbClr val="8A6D1E"/>
                 </a:solidFill>
                 <a:latin typeface="Amiri" pitchFamily="2" charset="-78"/>
+                <a:ea typeface="Amiri" pitchFamily="2" charset="-78"/>
                 <a:cs typeface="Amiri" pitchFamily="2" charset="-78"/>
               </a:rPr>
               <a:t>نَمُوذَجُ الإِجَابَةِ</a:t>
@@ -11043,6 +11133,7 @@
                   <a:srgbClr val="1B3B6F"/>
                 </a:solidFill>
                 <a:latin typeface="Amiri" pitchFamily="2" charset="-78"/>
+                <a:ea typeface="Amiri" pitchFamily="2" charset="-78"/>
                 <a:cs typeface="Amiri" pitchFamily="2" charset="-78"/>
               </a:rPr>
               <a:t>لِأَنَّهَا لَيْلَةُ الأَلْعَابِ النَّارِيَّةِ؛ يُحْتَفَلُ بِهَا فِي الخَامِسِ مِنْ نُوفَمْبِرَ.</a:t>
@@ -11119,6 +11210,7 @@
                   <a:srgbClr val="1B3B6F"/>
                 </a:solidFill>
                 <a:latin typeface="Amiri" pitchFamily="2" charset="-78"/>
+                <a:ea typeface="Amiri" pitchFamily="2" charset="-78"/>
                 <a:cs typeface="Amiri" pitchFamily="2" charset="-78"/>
               </a:rPr>
               <a:t>لِمَاذَا يُطْلِقُ النَّاسُ الأَلْعَابَ النَّارِيَّةَ اللَّيْلَةَ؟</a:t>
@@ -11222,6 +11314,7 @@
                   <a:srgbClr val="1B3B6F"/>
                 </a:solidFill>
                 <a:latin typeface="Amiri" pitchFamily="2" charset="-78"/>
+                <a:ea typeface="Amiri" pitchFamily="2" charset="-78"/>
                 <a:cs typeface="Amiri" pitchFamily="2" charset="-78"/>
               </a:rPr>
               <a:t>تُشْعَلُ نَارٌ كَبِيرَةٌ فِي الحَدِيقَةِ، وَيُؤْكَلُ الحَسَاءُ السَّاخِنُ.</a:t>
@@ -11298,6 +11391,7 @@
                   <a:srgbClr val="1B3B6F"/>
                 </a:solidFill>
                 <a:latin typeface="Amiri" pitchFamily="2" charset="-78"/>
+                <a:ea typeface="Amiri" pitchFamily="2" charset="-78"/>
                 <a:cs typeface="Amiri" pitchFamily="2" charset="-78"/>
               </a:rPr>
               <a:t>وَمَاذَا يَفْعَلُ النَّاسُ؟</a:t>
@@ -11401,6 +11495,7 @@
                   <a:srgbClr val="1B3B6F"/>
                 </a:solidFill>
                 <a:latin typeface="Amiri" pitchFamily="2" charset="-78"/>
+                <a:ea typeface="Amiri" pitchFamily="2" charset="-78"/>
                 <a:cs typeface="Amiri" pitchFamily="2" charset="-78"/>
               </a:rPr>
               <a:t>نَعَمْ، يَعُودُ إِلَى سَنَةِ أَلْفٍ وَسِتِّمِئَةٍ وَخَمْسٍ، أَيْ أَكْثَرَ مِنْ أَرْبَعِمِئَةِ سَنَةٍ.</a:t>
@@ -11477,6 +11572,7 @@
                   <a:srgbClr val="1B3B6F"/>
                 </a:solidFill>
                 <a:latin typeface="Amiri" pitchFamily="2" charset="-78"/>
+                <a:ea typeface="Amiri" pitchFamily="2" charset="-78"/>
                 <a:cs typeface="Amiri" pitchFamily="2" charset="-78"/>
               </a:rPr>
               <a:t>هَلْ هُوَ تَقْلِيدٌ قَدِيمٌ؟</a:t>
@@ -11580,6 +11676,7 @@
                   <a:srgbClr val="1B3B6F"/>
                 </a:solidFill>
                 <a:latin typeface="Amiri" pitchFamily="2" charset="-78"/>
+                <a:ea typeface="Amiri" pitchFamily="2" charset="-78"/>
                 <a:cs typeface="Amiri" pitchFamily="2" charset="-78"/>
               </a:rPr>
               <a:t>مَتَى يُحْتَفَلُ بِهِ؟ وَهَلْ هُوَ أَكْبَرُ مِنْ هٰذَا الاحْتِفَالِ؟</a:t>
@@ -11656,6 +11753,7 @@
                   <a:srgbClr val="1B3B6F"/>
                 </a:solidFill>
                 <a:latin typeface="Amiri" pitchFamily="2" charset="-78"/>
+                <a:ea typeface="Amiri" pitchFamily="2" charset="-78"/>
                 <a:cs typeface="Amiri" pitchFamily="2" charset="-78"/>
               </a:rPr>
               <a:t>عِنْدَنَا فِي الأُرْدُنِّ عِيدُ الاسْتِقْلَالِ.</a:t>
@@ -11759,6 +11857,7 @@
                   <a:srgbClr val="1B3B6F"/>
                 </a:solidFill>
                 <a:latin typeface="Amiri" pitchFamily="2" charset="-78"/>
+                <a:ea typeface="Amiri" pitchFamily="2" charset="-78"/>
                 <a:cs typeface="Amiri" pitchFamily="2" charset="-78"/>
               </a:rPr>
               <a:t>أُفَضِّلُ عِيدَ الاسْتِقْلَالِ، لِأَنَّهُ أَكْثَرُ فَرَحًا، وَفِيهِ مُوسِيقَى وَرَقْصٌ أَكْثَرُ مِنْ لَيْلَتِنَا البَارِدَةِ!</a:t>
@@ -11835,6 +11934,7 @@
                   <a:srgbClr val="1B3B6F"/>
                 </a:solidFill>
                 <a:latin typeface="Amiri" pitchFamily="2" charset="-78"/>
+                <a:ea typeface="Amiri" pitchFamily="2" charset="-78"/>
                 <a:cs typeface="Amiri" pitchFamily="2" charset="-78"/>
               </a:rPr>
               <a:t>فِي أَيَّارَ، وَنَعَمْ، أَكْبَرُ بِكَثِيرٍ! أَيُّ احْتِفَالٍ تُفَضِّلُ؟</a:t>
@@ -12044,6 +12144,7 @@
                   <a:srgbClr val="D4AF37"/>
                 </a:solidFill>
                 <a:latin typeface="Amiri" pitchFamily="2" charset="-78"/>
+                <a:ea typeface="Amiri" pitchFamily="2" charset="-78"/>
                 <a:cs typeface="Amiri" pitchFamily="2" charset="-78"/>
               </a:rPr>
               <a:t>م</a:t>
@@ -12364,6 +12465,7 @@
                   <a:srgbClr val="8A6D1E"/>
                 </a:solidFill>
                 <a:latin typeface="Amiri" pitchFamily="2" charset="-78"/>
+                <a:ea typeface="Amiri" pitchFamily="2" charset="-78"/>
                 <a:cs typeface="Amiri" pitchFamily="2" charset="-78"/>
               </a:rPr>
               <a:t>نَمُوذَجُ الإِجَابَةِ</a:t>
@@ -12606,6 +12708,7 @@
                   <a:srgbClr val="1B3B6F"/>
                 </a:solidFill>
                 <a:latin typeface="Amiri" pitchFamily="2" charset="-78"/>
+                <a:ea typeface="Amiri" pitchFamily="2" charset="-78"/>
                 <a:cs typeface="Amiri" pitchFamily="2" charset="-78"/>
               </a:rPr>
               <a:t>هُوَ عِيدُ الرَّبِيعِ فِي مِصْرَ، يُحْتَفَلُ بِهِ كُلَّ عَامٍ مُنْذُ أَيَّامِ الفَرَاعِنَةِ، وَيَحْتَفِلُ بِهِ المُسْلِمُونَ وَالمَسِيحِيُّونَ مَعًا.</a:t>
@@ -12682,6 +12785,7 @@
                   <a:srgbClr val="1B3B6F"/>
                 </a:solidFill>
                 <a:latin typeface="Amiri" pitchFamily="2" charset="-78"/>
+                <a:ea typeface="Amiri" pitchFamily="2" charset="-78"/>
                 <a:cs typeface="Amiri" pitchFamily="2" charset="-78"/>
               </a:rPr>
               <a:t>مَا هُوَ شَمُّ النَّسِيمِ؟</a:t>
@@ -12785,6 +12889,7 @@
                   <a:srgbClr val="1B3B6F"/>
                 </a:solidFill>
                 <a:latin typeface="Amiri" pitchFamily="2" charset="-78"/>
+                <a:ea typeface="Amiri" pitchFamily="2" charset="-78"/>
                 <a:cs typeface="Amiri" pitchFamily="2" charset="-78"/>
               </a:rPr>
               <a:t>خَرَجْنَا مُبَكِّرًا إِلَى حَدِيقَةٍ عَلَى النِّيلِ، ثُمَّ لَوَّنَّا البَيْضَ مَعَ أَبْنَاءِ خَالِي، وَأَكَلْنَا السَّمَكَ المُمَلَّحَ وَالبَصَلَ الأَخْضَرَ.</a:t>
@@ -12861,6 +12966,7 @@
                   <a:srgbClr val="1B3B6F"/>
                 </a:solidFill>
                 <a:latin typeface="Amiri" pitchFamily="2" charset="-78"/>
+                <a:ea typeface="Amiri" pitchFamily="2" charset="-78"/>
                 <a:cs typeface="Amiri" pitchFamily="2" charset="-78"/>
               </a:rPr>
               <a:t>كَيْفَ احْتَفَلْتَ بِهِ هٰذِهِ السَّنَةَ؟</a:t>
@@ -12964,6 +13070,7 @@
                   <a:srgbClr val="1B3B6F"/>
                 </a:solidFill>
                 <a:latin typeface="Amiri" pitchFamily="2" charset="-78"/>
+                <a:ea typeface="Amiri" pitchFamily="2" charset="-78"/>
                 <a:cs typeface="Amiri" pitchFamily="2" charset="-78"/>
               </a:rPr>
               <a:t>يُشْبِهُ عُطْلَةَ الرَّبِيعِ هُنَا فِي تَلْوِينِ البَيْضِ، لٰكِنَّهُ أَكْثَرُ ازْدِحَامًا، فَكُلُّ الحَدَائِقِ تَمْتَلِئُ بِالعَائِلَاتِ.</a:t>
@@ -13040,6 +13147,7 @@
                   <a:srgbClr val="1B3B6F"/>
                 </a:solidFill>
                 <a:latin typeface="Amiri" pitchFamily="2" charset="-78"/>
+                <a:ea typeface="Amiri" pitchFamily="2" charset="-78"/>
                 <a:cs typeface="Amiri" pitchFamily="2" charset="-78"/>
               </a:rPr>
               <a:t>هَلْ يُشْبِهُ أَيَّ احْتِفَالٍ فِي بَرِيطَانْيَا؟</a:t>
@@ -13143,6 +13251,7 @@
                   <a:srgbClr val="1B3B6F"/>
                 </a:solidFill>
                 <a:latin typeface="Amiri" pitchFamily="2" charset="-78"/>
+                <a:ea typeface="Amiri" pitchFamily="2" charset="-78"/>
                 <a:cs typeface="Amiri" pitchFamily="2" charset="-78"/>
               </a:rPr>
               <a:t>أَعْجَبَنِي أَنَّ العِيدَ لِلْجَمِيعِ؛ مَثَلًا، جَلَسَتْ بِجَانِبِنَا عَائِلَةٌ مَسِيحِيَّةٌ، فَتَبَادَلْنَا الطَّعَامَ وَالضَّحِكَ.</a:t>
@@ -13219,6 +13328,7 @@
                   <a:srgbClr val="1B3B6F"/>
                 </a:solidFill>
                 <a:latin typeface="Amiri" pitchFamily="2" charset="-78"/>
+                <a:ea typeface="Amiri" pitchFamily="2" charset="-78"/>
                 <a:cs typeface="Amiri" pitchFamily="2" charset="-78"/>
               </a:rPr>
               <a:t>مَا الشَّيْءُ الَّذِي أَعْجَبَكَ أَكْثَرَ؟</a:t>
@@ -13322,6 +13432,7 @@
                   <a:srgbClr val="1B3B6F"/>
                 </a:solidFill>
                 <a:latin typeface="Amiri" pitchFamily="2" charset="-78"/>
+                <a:ea typeface="Amiri" pitchFamily="2" charset="-78"/>
                 <a:cs typeface="Amiri" pitchFamily="2" charset="-78"/>
               </a:rPr>
               <a:t>إِذَا كَانَ الجَوُّ جَمِيلًا، فَسَنَخْرُجُ إِلَى الحَدِيقَةِ مَعَ أَصْدِقَائِي المِصْرِيِّينَ، وَسَأُحْضِرُ البَيْضَ المُلَوَّنَ.</a:t>
@@ -13398,6 +13509,7 @@
                   <a:srgbClr val="1B3B6F"/>
                 </a:solidFill>
                 <a:latin typeface="Amiri" pitchFamily="2" charset="-78"/>
+                <a:ea typeface="Amiri" pitchFamily="2" charset="-78"/>
                 <a:cs typeface="Amiri" pitchFamily="2" charset="-78"/>
               </a:rPr>
               <a:t>هَلْ سَتَحْتَفِلُ بِهِ فِي بَرِيطَانْيَا؟</a:t>
@@ -13607,6 +13719,7 @@
                   <a:srgbClr val="D4AF37"/>
                 </a:solidFill>
                 <a:latin typeface="Amiri" pitchFamily="2" charset="-78"/>
+                <a:ea typeface="Amiri" pitchFamily="2" charset="-78"/>
                 <a:cs typeface="Amiri" pitchFamily="2" charset="-78"/>
               </a:rPr>
               <a:t>م</a:t>
@@ -13927,6 +14040,7 @@
                   <a:srgbClr val="8A6D1E"/>
                 </a:solidFill>
                 <a:latin typeface="Amiri" pitchFamily="2" charset="-78"/>
+                <a:ea typeface="Amiri" pitchFamily="2" charset="-78"/>
                 <a:cs typeface="Amiri" pitchFamily="2" charset="-78"/>
               </a:rPr>
               <a:t>نَمُوذَجُ الإِجَابَةِ</a:t>
@@ -14169,6 +14283,7 @@
                   <a:srgbClr val="1B3B6F"/>
                 </a:solidFill>
                 <a:latin typeface="Amiri" pitchFamily="2" charset="-78"/>
+                <a:ea typeface="Amiri" pitchFamily="2" charset="-78"/>
                 <a:cs typeface="Amiri" pitchFamily="2" charset="-78"/>
               </a:rPr>
               <a:t>مِنْ نَاحِيَةٍ، تَجْمَعُ هٰذِهِ الاحْتِفَالَاتُ النَّاسَ وَتُقَوِّي الانْتِمَاءَ، وَمِنْ نَاحِيَةٍ أُخْرَى، المَبْلَغُ كَبِيرٌ فِي وَقْتٍ تُغْلَقُ فِيهِ المَكْتَبَاتُ.</a:t>
@@ -14248,6 +14363,7 @@
                   <a:srgbClr val="1B3B6F"/>
                 </a:solidFill>
                 <a:latin typeface="Amiri" pitchFamily="2" charset="-78"/>
+                <a:ea typeface="Amiri" pitchFamily="2" charset="-78"/>
                 <a:cs typeface="Amiri" pitchFamily="2" charset="-78"/>
               </a:rPr>
               <a:t>يُقْتَرَحُ أَنْ يُنْفَقَ مِلْيُونُ جُنَيْهٍ عَلَى احْتِفَالٍ وَطَنِيٍّ. مَا رَأْيُكَ؟</a:t>
@@ -14351,6 +14467,7 @@
                   <a:srgbClr val="1B3B6F"/>
                 </a:solidFill>
                 <a:latin typeface="Amiri" pitchFamily="2" charset="-78"/>
+                <a:ea typeface="Amiri" pitchFamily="2" charset="-78"/>
                 <a:cs typeface="Amiri" pitchFamily="2" charset="-78"/>
               </a:rPr>
               <a:t>نُظِّمَ فِي وَسَطِ المَدِينَةِ، وَحَضَرَهُ أَكْثَرُ مِنْ عِشْرِينَ أَلْفَ شَخْصٍ، غَيْرَ أَنَّ الأَحْيَاءَ الفَقِيرَةَ لَمْ تُشَارِكْ فِيهِ.</a:t>
@@ -14427,6 +14544,7 @@
                   <a:srgbClr val="1B3B6F"/>
                 </a:solidFill>
                 <a:latin typeface="Amiri" pitchFamily="2" charset="-78"/>
+                <a:ea typeface="Amiri" pitchFamily="2" charset="-78"/>
                 <a:cs typeface="Amiri" pitchFamily="2" charset="-78"/>
               </a:rPr>
               <a:t>كَيْفَ كَانَ الاحْتِفَالُ فِي السَّنَةِ المَاضِيَةِ؟</a:t>
@@ -14530,6 +14648,7 @@
                   <a:srgbClr val="1B3B6F"/>
                 </a:solidFill>
                 <a:latin typeface="Amiri" pitchFamily="2" charset="-78"/>
+                <a:ea typeface="Amiri" pitchFamily="2" charset="-78"/>
                 <a:cs typeface="Amiri" pitchFamily="2" charset="-78"/>
               </a:rPr>
               <a:t>أَقْتَرِحُ أَنْ تُقَامَ احْتِفَالَاتٌ صَغِيرَةٌ فِي كُلِّ حَيٍّ، لِأَنَّ ذٰلِكَ أَقَلُّ تَكْلِفَةً وَأَكْثَرُ عَدْلًا.</a:t>
@@ -14606,6 +14725,7 @@
                   <a:srgbClr val="1B3B6F"/>
                 </a:solidFill>
                 <a:latin typeface="Amiri" pitchFamily="2" charset="-78"/>
+                <a:ea typeface="Amiri" pitchFamily="2" charset="-78"/>
                 <a:cs typeface="Amiri" pitchFamily="2" charset="-78"/>
               </a:rPr>
               <a:t>إِذَنْ مَاذَا تَقْتَرِحُ؟</a:t>
@@ -14709,6 +14829,7 @@
                   <a:srgbClr val="1B3B6F"/>
                 </a:solidFill>
                 <a:latin typeface="Amiri" pitchFamily="2" charset="-78"/>
+                <a:ea typeface="Amiri" pitchFamily="2" charset="-78"/>
                 <a:cs typeface="Amiri" pitchFamily="2" charset="-78"/>
               </a:rPr>
               <a:t>صَحِيحٌ أَنَّهُ يَجْذِبُ السُّيَّاحَ، غَيْرَ أَنَّ هَدَفَ العِيدِ الوَطَنِيِّ أَنْ يَشْعُرَ كُلُّ مُوَاطِنٍ بِأَنَّهُ جُزْءٌ مِنْهُ، لَا أَنْ يَتَفَرَّجَ مِنْ بَعِيدٍ.</a:t>
@@ -14785,6 +14906,7 @@
                   <a:srgbClr val="1B3B6F"/>
                 </a:solidFill>
                 <a:latin typeface="Amiri" pitchFamily="2" charset="-78"/>
+                <a:ea typeface="Amiri" pitchFamily="2" charset="-78"/>
                 <a:cs typeface="Amiri" pitchFamily="2" charset="-78"/>
               </a:rPr>
               <a:t>لٰكِنَّ الاحْتِفَالَ الكَبِيرَ يَجْذِبُ السُّيَّاحَ.</a:t>
@@ -14888,6 +15010,7 @@
                   <a:srgbClr val="1B3B6F"/>
                 </a:solidFill>
                 <a:latin typeface="Amiri" pitchFamily="2" charset="-78"/>
+                <a:ea typeface="Amiri" pitchFamily="2" charset="-78"/>
                 <a:cs typeface="Amiri" pitchFamily="2" charset="-78"/>
               </a:rPr>
               <a:t>لَوْ كُنْتُ رَئِيسَ البَلَدِيَّةِ، لَحَوَّلْتُ العِيدَ إِلَى يَوْمِ تَطَوُّعٍ، تُزْرَعُ فِيهِ الأَشْجَارُ وَتُزَيَّنُ المَدَارِسُ، ثُمَّ نَحْتَفِلُ مَعًا فِي المَسَاءِ.</a:t>
@@ -14964,6 +15087,7 @@
                   <a:srgbClr val="1B3B6F"/>
                 </a:solidFill>
                 <a:latin typeface="Amiri" pitchFamily="2" charset="-78"/>
+                <a:ea typeface="Amiri" pitchFamily="2" charset="-78"/>
                 <a:cs typeface="Amiri" pitchFamily="2" charset="-78"/>
               </a:rPr>
               <a:t>لَوْ كُنْتَ رَئِيسَ البَلَدِيَّةِ، كَيْفَ تَحْتَفِلُ؟</a:t>
@@ -15173,6 +15297,7 @@
                   <a:srgbClr val="D4AF37"/>
                 </a:solidFill>
                 <a:latin typeface="Amiri" pitchFamily="2" charset="-78"/>
+                <a:ea typeface="Amiri" pitchFamily="2" charset="-78"/>
                 <a:cs typeface="Amiri" pitchFamily="2" charset="-78"/>
               </a:rPr>
               <a:t>م</a:t>
@@ -15493,6 +15618,7 @@
                   <a:srgbClr val="8A6D1E"/>
                 </a:solidFill>
                 <a:latin typeface="Amiri" pitchFamily="2" charset="-78"/>
+                <a:ea typeface="Amiri" pitchFamily="2" charset="-78"/>
                 <a:cs typeface="Amiri" pitchFamily="2" charset="-78"/>
               </a:rPr>
               <a:t>الأَعْيَادُ الوَطَنِيَّةُ</a:t>
@@ -15773,6 +15899,7 @@
                   <a:srgbClr val="1B3B6F"/>
                 </a:solidFill>
                 <a:latin typeface="Amiri" pitchFamily="2" charset="-78"/>
+                <a:ea typeface="Amiri" pitchFamily="2" charset="-78"/>
                 <a:cs typeface="Amiri" pitchFamily="2" charset="-78"/>
               </a:rPr>
               <a:t>اليَوْمُ الوَطَنِيُّ … فِي …</a:t>
@@ -15849,6 +15976,7 @@
                   <a:srgbClr val="1B3B6F"/>
                 </a:solidFill>
                 <a:latin typeface="Amiri" pitchFamily="2" charset="-78"/>
+                <a:ea typeface="Amiri" pitchFamily="2" charset="-78"/>
                 <a:cs typeface="Amiri" pitchFamily="2" charset="-78"/>
               </a:rPr>
               <a:t>مَا اليَوْمُ الوَطَنِيُّ لِبَلَدِ أُسْرَتِكَ؟</a:t>
@@ -16017,6 +16145,7 @@
                   <a:srgbClr val="1B3B6F"/>
                 </a:solidFill>
                 <a:latin typeface="Amiri" pitchFamily="2" charset="-78"/>
+                <a:ea typeface="Amiri" pitchFamily="2" charset="-78"/>
                 <a:cs typeface="Amiri" pitchFamily="2" charset="-78"/>
               </a:rPr>
               <a:t>تُرْفَعُ … وَتُطْلَقُ …</a:t>
@@ -16093,6 +16222,7 @@
                   <a:srgbClr val="1B3B6F"/>
                 </a:solidFill>
                 <a:latin typeface="Amiri" pitchFamily="2" charset="-78"/>
+                <a:ea typeface="Amiri" pitchFamily="2" charset="-78"/>
                 <a:cs typeface="Amiri" pitchFamily="2" charset="-78"/>
               </a:rPr>
               <a:t>مَاذَا يَحْدُثُ فِي ذٰلِكَ اليَوْمِ؟</a:t>
@@ -16261,6 +16391,7 @@
                   <a:srgbClr val="1B3B6F"/>
                 </a:solidFill>
                 <a:latin typeface="Amiri" pitchFamily="2" charset="-78"/>
+                <a:ea typeface="Amiri" pitchFamily="2" charset="-78"/>
                 <a:cs typeface="Amiri" pitchFamily="2" charset="-78"/>
               </a:rPr>
               <a:t>نَعَمْ / لَا، … لِأَنَّ …</a:t>
@@ -16337,6 +16468,7 @@
                   <a:srgbClr val="1B3B6F"/>
                 </a:solidFill>
                 <a:latin typeface="Amiri" pitchFamily="2" charset="-78"/>
+                <a:ea typeface="Amiri" pitchFamily="2" charset="-78"/>
                 <a:cs typeface="Amiri" pitchFamily="2" charset="-78"/>
               </a:rPr>
               <a:t>هَلْ تُحِبُّ الأَلْعَابَ النَّارِيَّةَ؟</a:t>
@@ -16505,6 +16637,7 @@
                   <a:srgbClr val="1B3B6F"/>
                 </a:solidFill>
                 <a:latin typeface="Amiri" pitchFamily="2" charset="-78"/>
+                <a:ea typeface="Amiri" pitchFamily="2" charset="-78"/>
                 <a:cs typeface="Amiri" pitchFamily="2" charset="-78"/>
               </a:rPr>
               <a:t>رَقْصَتُنَا الشَّعْبِيَّةُ …</a:t>
@@ -16581,6 +16714,7 @@
                   <a:srgbClr val="1B3B6F"/>
                 </a:solidFill>
                 <a:latin typeface="Amiri" pitchFamily="2" charset="-78"/>
+                <a:ea typeface="Amiri" pitchFamily="2" charset="-78"/>
                 <a:cs typeface="Amiri" pitchFamily="2" charset="-78"/>
               </a:rPr>
               <a:t>مَا رَقْصَتُكُمُ الشَّعْبِيَّةُ؟</a:t>
@@ -16749,6 +16883,7 @@
                   <a:srgbClr val="1B3B6F"/>
                 </a:solidFill>
                 <a:latin typeface="Amiri" pitchFamily="2" charset="-78"/>
+                <a:ea typeface="Amiri" pitchFamily="2" charset="-78"/>
                 <a:cs typeface="Amiri" pitchFamily="2" charset="-78"/>
               </a:rPr>
               <a:t>أُحِبُّ …</a:t>
@@ -16825,6 +16960,7 @@
                   <a:srgbClr val="1B3B6F"/>
                 </a:solidFill>
                 <a:latin typeface="Amiri" pitchFamily="2" charset="-78"/>
+                <a:ea typeface="Amiri" pitchFamily="2" charset="-78"/>
                 <a:cs typeface="Amiri" pitchFamily="2" charset="-78"/>
               </a:rPr>
               <a:t>أَيُّ احْتِفَالٍ بَرِيطَانِيٍّ تُحِبُّ؟</a:t>
@@ -16979,6 +17115,7 @@
                   <a:srgbClr val="1B3B6F"/>
                 </a:solidFill>
                 <a:latin typeface="Amiri" pitchFamily="2" charset="-78"/>
+                <a:ea typeface="Amiri" pitchFamily="2" charset="-78"/>
                 <a:cs typeface="Amiri" pitchFamily="2" charset="-78"/>
               </a:rPr>
               <a:t>تُرْفَعُ</a:t>
@@ -17005,6 +17142,7 @@
                   <a:srgbClr val="1B3B6F"/>
                 </a:solidFill>
                 <a:latin typeface="Amiri" pitchFamily="2" charset="-78"/>
+                <a:ea typeface="Amiri" pitchFamily="2" charset="-78"/>
                 <a:cs typeface="Amiri" pitchFamily="2" charset="-78"/>
               </a:rPr>
               <a:t>تُطْلَقُ</a:t>
@@ -17031,6 +17169,7 @@
                   <a:srgbClr val="1B3B6F"/>
                 </a:solidFill>
                 <a:latin typeface="Amiri" pitchFamily="2" charset="-78"/>
+                <a:ea typeface="Amiri" pitchFamily="2" charset="-78"/>
                 <a:cs typeface="Amiri" pitchFamily="2" charset="-78"/>
               </a:rPr>
               <a:t>عَفْوًا، هَلْ يُمْكِنُ أَنْ تُعِيدَ السُّؤَالَ؟</a:t>
@@ -17164,6 +17303,7 @@
                   <a:srgbClr val="D4AF37"/>
                 </a:solidFill>
                 <a:latin typeface="Amiri" pitchFamily="2" charset="-78"/>
+                <a:ea typeface="Amiri" pitchFamily="2" charset="-78"/>
                 <a:cs typeface="Amiri" pitchFamily="2" charset="-78"/>
               </a:rPr>
               <a:t>م</a:t>
@@ -17484,6 +17624,7 @@
                   <a:srgbClr val="8A6D1E"/>
                 </a:solidFill>
                 <a:latin typeface="Amiri" pitchFamily="2" charset="-78"/>
+                <a:ea typeface="Amiri" pitchFamily="2" charset="-78"/>
                 <a:cs typeface="Amiri" pitchFamily="2" charset="-78"/>
               </a:rPr>
               <a:t>تَقَالِيدُنَا وَاحْتِفَالَاتُنَا</a:t>
@@ -17764,6 +17905,7 @@
                   <a:srgbClr val="1B3B6F"/>
                 </a:solidFill>
                 <a:latin typeface="Amiri" pitchFamily="2" charset="-78"/>
+                <a:ea typeface="Amiri" pitchFamily="2" charset="-78"/>
                 <a:cs typeface="Amiri" pitchFamily="2" charset="-78"/>
               </a:rPr>
               <a:t>حَضَرْتُ … ؛ كَانَتِ الشَّوَارِعُ … وَ…</a:t>
@@ -17840,6 +17982,7 @@
                   <a:srgbClr val="1B3B6F"/>
                 </a:solidFill>
                 <a:latin typeface="Amiri" pitchFamily="2" charset="-78"/>
+                <a:ea typeface="Amiri" pitchFamily="2" charset="-78"/>
                 <a:cs typeface="Amiri" pitchFamily="2" charset="-78"/>
               </a:rPr>
               <a:t>صِفْ احْتِفَالًا وَطَنِيًّا حَضَرْتَهُ.</a:t>
@@ -17943,6 +18086,7 @@
                   <a:srgbClr val="1B3B6F"/>
                 </a:solidFill>
                 <a:latin typeface="Amiri" pitchFamily="2" charset="-78"/>
+                <a:ea typeface="Amiri" pitchFamily="2" charset="-78"/>
                 <a:cs typeface="Amiri" pitchFamily="2" charset="-78"/>
               </a:rPr>
               <a:t>… أَكْبَرُ / أَكْثَرُ … مِنْ … بَيْنَمَا …</a:t>
@@ -18019,6 +18163,7 @@
                   <a:srgbClr val="1B3B6F"/>
                 </a:solidFill>
                 <a:latin typeface="Amiri" pitchFamily="2" charset="-78"/>
+                <a:ea typeface="Amiri" pitchFamily="2" charset="-78"/>
                 <a:cs typeface="Amiri" pitchFamily="2" charset="-78"/>
               </a:rPr>
               <a:t>قَارِنْ بَيْنَ احْتِفَالٍ عَرَبِيٍّ وَاحْتِفَالٍ بَرِيطَانِيٍّ.</a:t>
@@ -18122,6 +18267,7 @@
                   <a:srgbClr val="1B3B6F"/>
                 </a:solidFill>
                 <a:latin typeface="Amiri" pitchFamily="2" charset="-78"/>
+                <a:ea typeface="Amiri" pitchFamily="2" charset="-78"/>
                 <a:cs typeface="Amiri" pitchFamily="2" charset="-78"/>
               </a:rPr>
               <a:t>التَّقْلِيدُ الَّذِي … هُوَ … لِأَنَّ …</a:t>
@@ -18198,6 +18344,7 @@
                   <a:srgbClr val="1B3B6F"/>
                 </a:solidFill>
                 <a:latin typeface="Amiri" pitchFamily="2" charset="-78"/>
+                <a:ea typeface="Amiri" pitchFamily="2" charset="-78"/>
                 <a:cs typeface="Amiri" pitchFamily="2" charset="-78"/>
               </a:rPr>
               <a:t>مَا التَّقْلِيدُ الشَّعْبِيُّ الَّذِي تُحِبُّهُ أَكْثَرَ؟</a:t>
@@ -18301,6 +18448,7 @@
                   <a:srgbClr val="1B3B6F"/>
                 </a:solidFill>
                 <a:latin typeface="Amiri" pitchFamily="2" charset="-78"/>
+                <a:ea typeface="Amiri" pitchFamily="2" charset="-78"/>
                 <a:cs typeface="Amiri" pitchFamily="2" charset="-78"/>
               </a:rPr>
               <a:t>كَانَتْ … أَمَّا الآنَ فَتُنَظِّمُهَا …</a:t>
@@ -18377,6 +18525,7 @@
                   <a:srgbClr val="1B3B6F"/>
                 </a:solidFill>
                 <a:latin typeface="Amiri" pitchFamily="2" charset="-78"/>
+                <a:ea typeface="Amiri" pitchFamily="2" charset="-78"/>
                 <a:cs typeface="Amiri" pitchFamily="2" charset="-78"/>
               </a:rPr>
               <a:t>كَيْفَ كَانَتْ هٰذِهِ الأَعْيَادُ فِي طُفُولَةِ وَالِدَيْكَ؟</a:t>
@@ -18480,6 +18629,7 @@
                   <a:srgbClr val="1B3B6F"/>
                 </a:solidFill>
                 <a:latin typeface="Amiri" pitchFamily="2" charset="-78"/>
+                <a:ea typeface="Amiri" pitchFamily="2" charset="-78"/>
                 <a:cs typeface="Amiri" pitchFamily="2" charset="-78"/>
               </a:rPr>
               <a:t>أَتَمَنَّى أَنْ أَحْضُرَ … لِأَنَّ …</a:t>
@@ -18556,6 +18706,7 @@
                   <a:srgbClr val="1B3B6F"/>
                 </a:solidFill>
                 <a:latin typeface="Amiri" pitchFamily="2" charset="-78"/>
+                <a:ea typeface="Amiri" pitchFamily="2" charset="-78"/>
                 <a:cs typeface="Amiri" pitchFamily="2" charset="-78"/>
               </a:rPr>
               <a:t>أَيُّ احْتِفَالٍ تَتَمَنَّى أَنْ تَحْضُرَهُ؟</a:t>
@@ -18765,6 +18916,7 @@
                   <a:srgbClr val="D4AF37"/>
                 </a:solidFill>
                 <a:latin typeface="Amiri" pitchFamily="2" charset="-78"/>
+                <a:ea typeface="Amiri" pitchFamily="2" charset="-78"/>
                 <a:cs typeface="Amiri" pitchFamily="2" charset="-78"/>
               </a:rPr>
               <a:t>م</a:t>
@@ -19085,6 +19237,7 @@
                   <a:srgbClr val="8A6D1E"/>
                 </a:solidFill>
                 <a:latin typeface="Amiri" pitchFamily="2" charset="-78"/>
+                <a:ea typeface="Amiri" pitchFamily="2" charset="-78"/>
                 <a:cs typeface="Amiri" pitchFamily="2" charset="-78"/>
               </a:rPr>
               <a:t>الوَطَنُ وَالتَّقَالِيدُ</a:t>
@@ -19365,6 +19518,7 @@
                   <a:srgbClr val="1B3B6F"/>
                 </a:solidFill>
                 <a:latin typeface="Amiri" pitchFamily="2" charset="-78"/>
+                <a:ea typeface="Amiri" pitchFamily="2" charset="-78"/>
                 <a:cs typeface="Amiri" pitchFamily="2" charset="-78"/>
               </a:rPr>
               <a:t>صَحِيحٌ أَنَّ … غَيْرَ أَنَّ …</a:t>
@@ -19441,6 +19595,7 @@
                   <a:srgbClr val="1B3B6F"/>
                 </a:solidFill>
                 <a:latin typeface="Amiri" pitchFamily="2" charset="-78"/>
+                <a:ea typeface="Amiri" pitchFamily="2" charset="-78"/>
                 <a:cs typeface="Amiri" pitchFamily="2" charset="-78"/>
               </a:rPr>
               <a:t>هَلْ تَسْتَحِقُّ الاحْتِفَالَاتُ الوَطَنِيَّةُ أَمْوَالَهَا الكَبِيرَةَ؟</a:t>
@@ -19544,6 +19699,7 @@
                   <a:srgbClr val="1B3B6F"/>
                 </a:solidFill>
                 <a:latin typeface="Amiri" pitchFamily="2" charset="-78"/>
+                <a:ea typeface="Amiri" pitchFamily="2" charset="-78"/>
                 <a:cs typeface="Amiri" pitchFamily="2" charset="-78"/>
               </a:rPr>
               <a:t>يَجِبُ أَنْ … ؛ فَإِذَا … فَلَنْ …</a:t>
@@ -19620,6 +19776,7 @@
                   <a:srgbClr val="1B3B6F"/>
                 </a:solidFill>
                 <a:latin typeface="Amiri" pitchFamily="2" charset="-78"/>
+                <a:ea typeface="Amiri" pitchFamily="2" charset="-78"/>
                 <a:cs typeface="Amiri" pitchFamily="2" charset="-78"/>
               </a:rPr>
               <a:t>كَيْفَ نُحَافِظُ عَلَى التَّقَالِيدِ الشَّعْبِيَّةِ؟</a:t>
@@ -19723,6 +19880,7 @@
                   <a:srgbClr val="1B3B6F"/>
                 </a:solidFill>
                 <a:latin typeface="Amiri" pitchFamily="2" charset="-78"/>
+                <a:ea typeface="Amiri" pitchFamily="2" charset="-78"/>
                 <a:cs typeface="Amiri" pitchFamily="2" charset="-78"/>
               </a:rPr>
               <a:t>أَرَى أَنَّ … لِأَنَّ … ؛ مَثَلًا …</a:t>
@@ -19799,6 +19957,7 @@
                   <a:srgbClr val="1B3B6F"/>
                 </a:solidFill>
                 <a:latin typeface="Amiri" pitchFamily="2" charset="-78"/>
+                <a:ea typeface="Amiri" pitchFamily="2" charset="-78"/>
                 <a:cs typeface="Amiri" pitchFamily="2" charset="-78"/>
               </a:rPr>
               <a:t>هَلْ يُمْكِنُ أَنْ يَحْتَفِلَ الإِنْسَانُ بِيَوْمَيْنِ وَطَنِيَّيْنِ؟</a:t>
@@ -19902,6 +20061,7 @@
                   <a:srgbClr val="1B3B6F"/>
                 </a:solidFill>
                 <a:latin typeface="Amiri" pitchFamily="2" charset="-78"/>
+                <a:ea typeface="Amiri" pitchFamily="2" charset="-78"/>
                 <a:cs typeface="Amiri" pitchFamily="2" charset="-78"/>
               </a:rPr>
               <a:t>الفَخْرُ … أَمَّا التَّعَصُّبُ فَأَنْ …</a:t>
@@ -19978,6 +20138,7 @@
                   <a:srgbClr val="1B3B6F"/>
                 </a:solidFill>
                 <a:latin typeface="Amiri" pitchFamily="2" charset="-78"/>
+                <a:ea typeface="Amiri" pitchFamily="2" charset="-78"/>
                 <a:cs typeface="Amiri" pitchFamily="2" charset="-78"/>
               </a:rPr>
               <a:t>مَا الفَرْقُ بَيْنَ الفَخْرِ الوَطَنِيِّ وَالتَّعَصُّبِ؟</a:t>
@@ -20081,6 +20242,7 @@
                   <a:srgbClr val="1B3B6F"/>
                 </a:solidFill>
                 <a:latin typeface="Amiri" pitchFamily="2" charset="-78"/>
+                <a:ea typeface="Amiri" pitchFamily="2" charset="-78"/>
                 <a:cs typeface="Amiri" pitchFamily="2" charset="-78"/>
               </a:rPr>
               <a:t>لَوِ اخْتَرَعْتُهُ، لَسَمَّيْتُهُ …</a:t>
@@ -20157,6 +20319,7 @@
                   <a:srgbClr val="1B3B6F"/>
                 </a:solidFill>
                 <a:latin typeface="Amiri" pitchFamily="2" charset="-78"/>
+                <a:ea typeface="Amiri" pitchFamily="2" charset="-78"/>
                 <a:cs typeface="Amiri" pitchFamily="2" charset="-78"/>
               </a:rPr>
               <a:t>لَوْ اخْتَرَعْتَ عِيدًا جَدِيدًا لِمَدِينَتِكَ، كَيْفَ يَكُونُ؟</a:t>
@@ -20366,6 +20529,7 @@
                   <a:srgbClr val="D4AF37"/>
                 </a:solidFill>
                 <a:latin typeface="Amiri" pitchFamily="2" charset="-78"/>
+                <a:ea typeface="Amiri" pitchFamily="2" charset="-78"/>
                 <a:cs typeface="Amiri" pitchFamily="2" charset="-78"/>
               </a:rPr>
               <a:t>م</a:t>
@@ -20686,6 +20850,7 @@
                   <a:srgbClr val="8A6D1E"/>
                 </a:solidFill>
                 <a:latin typeface="Amiri" pitchFamily="2" charset="-78"/>
+                <a:ea typeface="Amiri" pitchFamily="2" charset="-78"/>
                 <a:cs typeface="Amiri" pitchFamily="2" charset="-78"/>
               </a:rPr>
               <a:t>آدَابُ الصَّفِّ</a:t>
@@ -22217,6 +22382,7 @@
                   <a:srgbClr val="D4AF37"/>
                 </a:solidFill>
                 <a:latin typeface="Amiri" pitchFamily="2" charset="-78"/>
+                <a:ea typeface="Amiri" pitchFamily="2" charset="-78"/>
                 <a:cs typeface="Amiri" pitchFamily="2" charset="-78"/>
               </a:rPr>
               <a:t>م</a:t>
@@ -22537,6 +22703,7 @@
                   <a:srgbClr val="8A6D1E"/>
                 </a:solidFill>
                 <a:latin typeface="Amiri" pitchFamily="2" charset="-78"/>
+                <a:ea typeface="Amiri" pitchFamily="2" charset="-78"/>
                 <a:cs typeface="Amiri" pitchFamily="2" charset="-78"/>
               </a:rPr>
               <a:t>نَمُوذَجُ الإِجَابَةِ</a:t>
@@ -22779,6 +22946,7 @@
                   <a:srgbClr val="1B3B6F"/>
                 </a:solidFill>
                 <a:latin typeface="Amiri" pitchFamily="2" charset="-78"/>
+                <a:ea typeface="Amiri" pitchFamily="2" charset="-78"/>
                 <a:cs typeface="Amiri" pitchFamily="2" charset="-78"/>
               </a:rPr>
               <a:t>اليَوْمُ الوَطَنِيُّ لِلسُّعُودِيَّةِ فِي الثَّالِثِ وَالعِشْرِينَ مِنْ سِبْتَمْبِرَ.</a:t>
@@ -22855,6 +23023,7 @@
                   <a:srgbClr val="1B3B6F"/>
                 </a:solidFill>
                 <a:latin typeface="Amiri" pitchFamily="2" charset="-78"/>
+                <a:ea typeface="Amiri" pitchFamily="2" charset="-78"/>
                 <a:cs typeface="Amiri" pitchFamily="2" charset="-78"/>
               </a:rPr>
               <a:t>مَا اليَوْمُ الوَطَنِيُّ لِبَلَدِ أُسْرَتِكَ؟</a:t>
@@ -22958,6 +23127,7 @@
                   <a:srgbClr val="1B3B6F"/>
                 </a:solidFill>
                 <a:latin typeface="Amiri" pitchFamily="2" charset="-78"/>
+                <a:ea typeface="Amiri" pitchFamily="2" charset="-78"/>
                 <a:cs typeface="Amiri" pitchFamily="2" charset="-78"/>
               </a:rPr>
               <a:t>تُرْفَعُ الأَعْلَامُ، وَتُطْلَقُ الأَلْعَابُ النَّارِيَّةُ.</a:t>
@@ -23034,6 +23204,7 @@
                   <a:srgbClr val="1B3B6F"/>
                 </a:solidFill>
                 <a:latin typeface="Amiri" pitchFamily="2" charset="-78"/>
+                <a:ea typeface="Amiri" pitchFamily="2" charset="-78"/>
                 <a:cs typeface="Amiri" pitchFamily="2" charset="-78"/>
               </a:rPr>
               <a:t>مَاذَا يَحْدُثُ فِي ذٰلِكَ اليَوْمِ؟</a:t>
@@ -23137,6 +23308,7 @@
                   <a:srgbClr val="1B3B6F"/>
                 </a:solidFill>
                 <a:latin typeface="Amiri" pitchFamily="2" charset="-78"/>
+                <a:ea typeface="Amiri" pitchFamily="2" charset="-78"/>
                 <a:cs typeface="Amiri" pitchFamily="2" charset="-78"/>
               </a:rPr>
               <a:t>نَعَمْ، أُحِبُّهَا لِأَنَّهَا جَمِيلَةٌ.</a:t>
@@ -23213,6 +23385,7 @@
                   <a:srgbClr val="1B3B6F"/>
                 </a:solidFill>
                 <a:latin typeface="Amiri" pitchFamily="2" charset="-78"/>
+                <a:ea typeface="Amiri" pitchFamily="2" charset="-78"/>
                 <a:cs typeface="Amiri" pitchFamily="2" charset="-78"/>
               </a:rPr>
               <a:t>هَلْ تُحِبُّ الأَلْعَابَ النَّارِيَّةَ؟</a:t>
@@ -23316,6 +23489,7 @@
                   <a:srgbClr val="1B3B6F"/>
                 </a:solidFill>
                 <a:latin typeface="Amiri" pitchFamily="2" charset="-78"/>
+                <a:ea typeface="Amiri" pitchFamily="2" charset="-78"/>
                 <a:cs typeface="Amiri" pitchFamily="2" charset="-78"/>
               </a:rPr>
               <a:t>رَقْصَتُنَا الشَّعْبِيَّةُ الدَّبْكَةُ.</a:t>
@@ -23392,6 +23566,7 @@
                   <a:srgbClr val="1B3B6F"/>
                 </a:solidFill>
                 <a:latin typeface="Amiri" pitchFamily="2" charset="-78"/>
+                <a:ea typeface="Amiri" pitchFamily="2" charset="-78"/>
                 <a:cs typeface="Amiri" pitchFamily="2" charset="-78"/>
               </a:rPr>
               <a:t>مَا رَقْصَتُكُمُ الشَّعْبِيَّةُ؟</a:t>
@@ -23495,6 +23670,7 @@
                   <a:srgbClr val="1B3B6F"/>
                 </a:solidFill>
                 <a:latin typeface="Amiri" pitchFamily="2" charset="-78"/>
+                <a:ea typeface="Amiri" pitchFamily="2" charset="-78"/>
                 <a:cs typeface="Amiri" pitchFamily="2" charset="-78"/>
               </a:rPr>
               <a:t>أُحِبُّ كَرْنَفَالَ نُوتِنْغ هِيل، لِأَنَّ فِيهِ مُوسِيقَى.</a:t>
@@ -23571,6 +23747,7 @@
                   <a:srgbClr val="1B3B6F"/>
                 </a:solidFill>
                 <a:latin typeface="Amiri" pitchFamily="2" charset="-78"/>
+                <a:ea typeface="Amiri" pitchFamily="2" charset="-78"/>
                 <a:cs typeface="Amiri" pitchFamily="2" charset="-78"/>
               </a:rPr>
               <a:t>أَيُّ احْتِفَالٍ بَرِيطَانِيٍّ تُحِبُّ؟</a:t>
@@ -23780,6 +23957,7 @@
                   <a:srgbClr val="D4AF37"/>
                 </a:solidFill>
                 <a:latin typeface="Amiri" pitchFamily="2" charset="-78"/>
+                <a:ea typeface="Amiri" pitchFamily="2" charset="-78"/>
                 <a:cs typeface="Amiri" pitchFamily="2" charset="-78"/>
               </a:rPr>
               <a:t>م</a:t>
@@ -24100,6 +24278,7 @@
                   <a:srgbClr val="8A6D1E"/>
                 </a:solidFill>
                 <a:latin typeface="Amiri" pitchFamily="2" charset="-78"/>
+                <a:ea typeface="Amiri" pitchFamily="2" charset="-78"/>
                 <a:cs typeface="Amiri" pitchFamily="2" charset="-78"/>
               </a:rPr>
               <a:t>نَمُوذَجُ الإِجَابَةِ</a:t>
@@ -24342,6 +24521,7 @@
                   <a:srgbClr val="1B3B6F"/>
                 </a:solidFill>
                 <a:latin typeface="Amiri" pitchFamily="2" charset="-78"/>
+                <a:ea typeface="Amiri" pitchFamily="2" charset="-78"/>
                 <a:cs typeface="Amiri" pitchFamily="2" charset="-78"/>
               </a:rPr>
               <a:t>حَضَرْتُ اليَوْمَ الوَطَنِيَّ فِي دُبَيّ؛ كَانَتِ الشَّوَارِعُ مُزَيَّنَةً بِالأَعْلَامِ، وَرَقَصَ الرِّجَالُ العَيَّالَةَ أَمَامَ النَّاسِ.</a:t>
@@ -24418,6 +24598,7 @@
                   <a:srgbClr val="1B3B6F"/>
                 </a:solidFill>
                 <a:latin typeface="Amiri" pitchFamily="2" charset="-78"/>
+                <a:ea typeface="Amiri" pitchFamily="2" charset="-78"/>
                 <a:cs typeface="Amiri" pitchFamily="2" charset="-78"/>
               </a:rPr>
               <a:t>صِفْ احْتِفَالًا وَطَنِيًّا حَضَرْتَهُ.</a:t>
@@ -24521,6 +24702,7 @@
                   <a:srgbClr val="1B3B6F"/>
                 </a:solidFill>
                 <a:latin typeface="Amiri" pitchFamily="2" charset="-78"/>
+                <a:ea typeface="Amiri" pitchFamily="2" charset="-78"/>
                 <a:cs typeface="Amiri" pitchFamily="2" charset="-78"/>
               </a:rPr>
               <a:t>اليَوْمُ الوَطَنِيُّ هُنَاكَ أَكْبَرُ مِنْ أَيِّ احْتِفَالٍ هُنَا، بَيْنَمَا الاحْتِفَالَاتُ البَرِيطَانِيَّةُ أَقْدَمُ تَارِيخًا وَأَكْثَرُ هُدُوءًا.</a:t>
@@ -24597,6 +24779,7 @@
                   <a:srgbClr val="1B3B6F"/>
                 </a:solidFill>
                 <a:latin typeface="Amiri" pitchFamily="2" charset="-78"/>
+                <a:ea typeface="Amiri" pitchFamily="2" charset="-78"/>
                 <a:cs typeface="Amiri" pitchFamily="2" charset="-78"/>
               </a:rPr>
               <a:t>قَارِنْ بَيْنَ احْتِفَالٍ عَرَبِيٍّ وَاحْتِفَالٍ بَرِيطَانِيٍّ.</a:t>
@@ -24700,6 +24883,7 @@
                   <a:srgbClr val="1B3B6F"/>
                 </a:solidFill>
                 <a:latin typeface="Amiri" pitchFamily="2" charset="-78"/>
+                <a:ea typeface="Amiri" pitchFamily="2" charset="-78"/>
                 <a:cs typeface="Amiri" pitchFamily="2" charset="-78"/>
               </a:rPr>
               <a:t>التَّقْلِيدُ الَّذِي أُحِبُّهُ هُوَ القَهْوَةُ العَرَبِيَّةُ، لِأَنَّهَا تُقَدَّمُ لِكُلِّ ضَيْفٍ، وَتُصَبُّ بِطَرِيقَةٍ خَاصَّةٍ.</a:t>
@@ -24776,6 +24960,7 @@
                   <a:srgbClr val="1B3B6F"/>
                 </a:solidFill>
                 <a:latin typeface="Amiri" pitchFamily="2" charset="-78"/>
+                <a:ea typeface="Amiri" pitchFamily="2" charset="-78"/>
                 <a:cs typeface="Amiri" pitchFamily="2" charset="-78"/>
               </a:rPr>
               <a:t>مَا التَّقْلِيدُ الشَّعْبِيُّ الَّذِي تُحِبُّهُ أَكْثَرَ؟</a:t>
@@ -24879,6 +25064,7 @@
                   <a:srgbClr val="1B3B6F"/>
                 </a:solidFill>
                 <a:latin typeface="Amiri" pitchFamily="2" charset="-78"/>
+                <a:ea typeface="Amiri" pitchFamily="2" charset="-78"/>
                 <a:cs typeface="Amiri" pitchFamily="2" charset="-78"/>
               </a:rPr>
               <a:t>كَانَتْ أَبْسَطَ، يَحْتَفِلُ بِهَا النَّاسُ فِي الحَيِّ، أَمَّا الآنَ فَتُنَظِّمُهَا الحُكُومَةُ وَتُبَثُّ عَلَى التِّلْفَازِ.</a:t>
@@ -24955,6 +25141,7 @@
                   <a:srgbClr val="1B3B6F"/>
                 </a:solidFill>
                 <a:latin typeface="Amiri" pitchFamily="2" charset="-78"/>
+                <a:ea typeface="Amiri" pitchFamily="2" charset="-78"/>
                 <a:cs typeface="Amiri" pitchFamily="2" charset="-78"/>
               </a:rPr>
               <a:t>كَيْفَ كَانَتْ هٰذِهِ الأَعْيَادُ فِي طُفُولَةِ وَالِدَيْكَ؟</a:t>
@@ -25058,6 +25245,7 @@
                   <a:srgbClr val="1B3B6F"/>
                 </a:solidFill>
                 <a:latin typeface="Amiri" pitchFamily="2" charset="-78"/>
+                <a:ea typeface="Amiri" pitchFamily="2" charset="-78"/>
                 <a:cs typeface="Amiri" pitchFamily="2" charset="-78"/>
               </a:rPr>
               <a:t>أَتَمَنَّى أَنْ أَحْضُرَ مِهْرَجَانَ الجَنَادِرِيَّةِ، لِأَنَّ التُّرَاثَ السُّعُودِيَّ يُعْرَضُ فِيهِ بِكُلِّ أَشْكَالِهِ.</a:t>
@@ -25134,6 +25322,7 @@
                   <a:srgbClr val="1B3B6F"/>
                 </a:solidFill>
                 <a:latin typeface="Amiri" pitchFamily="2" charset="-78"/>
+                <a:ea typeface="Amiri" pitchFamily="2" charset="-78"/>
                 <a:cs typeface="Amiri" pitchFamily="2" charset="-78"/>
               </a:rPr>
               <a:t>أَيُّ احْتِفَالٍ تَتَمَنَّى أَنْ تَحْضُرَهُ؟</a:t>
@@ -25343,6 +25532,7 @@
                   <a:srgbClr val="D4AF37"/>
                 </a:solidFill>
                 <a:latin typeface="Amiri" pitchFamily="2" charset="-78"/>
+                <a:ea typeface="Amiri" pitchFamily="2" charset="-78"/>
                 <a:cs typeface="Amiri" pitchFamily="2" charset="-78"/>
               </a:rPr>
               <a:t>م</a:t>
@@ -25663,6 +25853,7 @@
                   <a:srgbClr val="8A6D1E"/>
                 </a:solidFill>
                 <a:latin typeface="Amiri" pitchFamily="2" charset="-78"/>
+                <a:ea typeface="Amiri" pitchFamily="2" charset="-78"/>
                 <a:cs typeface="Amiri" pitchFamily="2" charset="-78"/>
               </a:rPr>
               <a:t>نَمُوذَجُ الإِجَابَةِ</a:t>
@@ -25905,6 +26096,7 @@
                   <a:srgbClr val="1B3B6F"/>
                 </a:solidFill>
                 <a:latin typeface="Amiri" pitchFamily="2" charset="-78"/>
+                <a:ea typeface="Amiri" pitchFamily="2" charset="-78"/>
                 <a:cs typeface="Amiri" pitchFamily="2" charset="-78"/>
               </a:rPr>
               <a:t>صَحِيحٌ أَنَّهَا مُكْلِفَةٌ، غَيْرَ أَنَّ الشُّعُورَ بِالانْتِمَاءِ لَا يُقَدَّرُ بِثَمَنٍ؛ وَمَعَ ذٰلِكَ يَنْبَغِي أَلَّا تُنْفَقَ الأَمْوَالُ عَلَى حِسَابِ الخِدْمَاتِ.</a:t>
@@ -25984,6 +26176,7 @@
                   <a:srgbClr val="1B3B6F"/>
                 </a:solidFill>
                 <a:latin typeface="Amiri" pitchFamily="2" charset="-78"/>
+                <a:ea typeface="Amiri" pitchFamily="2" charset="-78"/>
                 <a:cs typeface="Amiri" pitchFamily="2" charset="-78"/>
               </a:rPr>
               <a:t>هَلْ تَسْتَحِقُّ الاحْتِفَالَاتُ الوَطَنِيَّةُ أَمْوَالَهَا الكَبِيرَةَ؟</a:t>
@@ -26087,6 +26280,7 @@
                   <a:srgbClr val="1B3B6F"/>
                 </a:solidFill>
                 <a:latin typeface="Amiri" pitchFamily="2" charset="-78"/>
+                <a:ea typeface="Amiri" pitchFamily="2" charset="-78"/>
                 <a:cs typeface="Amiri" pitchFamily="2" charset="-78"/>
               </a:rPr>
               <a:t>يَجِبُ أَنْ تُعَلَّمَ فِي المَدَارِسِ؛ فَإِذَا تَعَلَّمَ الأَطْفَالُ الدَّبْكَةَ وَالأَغَانِيَ الشَّعْبِيَّةَ، فَلَنْ تَخْتَفِيَ مَعَ الأَجْدَادِ.</a:t>
@@ -26163,6 +26357,7 @@
                   <a:srgbClr val="1B3B6F"/>
                 </a:solidFill>
                 <a:latin typeface="Amiri" pitchFamily="2" charset="-78"/>
+                <a:ea typeface="Amiri" pitchFamily="2" charset="-78"/>
                 <a:cs typeface="Amiri" pitchFamily="2" charset="-78"/>
               </a:rPr>
               <a:t>كَيْفَ نُحَافِظُ عَلَى التَّقَالِيدِ الشَّعْبِيَّةِ؟</a:t>
@@ -26269,6 +26464,7 @@
                   <a:srgbClr val="1B3B6F"/>
                 </a:solidFill>
                 <a:latin typeface="Amiri" pitchFamily="2" charset="-78"/>
+                <a:ea typeface="Amiri" pitchFamily="2" charset="-78"/>
                 <a:cs typeface="Amiri" pitchFamily="2" charset="-78"/>
               </a:rPr>
               <a:t>أَرَى أَنَّ ذٰلِكَ مُمْكِنٌ وَطَبِيعِيٌّ، لِأَنَّ الانْتِمَاءَ لَيْسَ قِطْعَةً وَاحِدَةً؛ مَثَلًا، أَرْفَعُ العَلَمَ السُّعُودِيَّ فِي سِبْتَمْبِرَ، وَأَحْتَفِلُ مَعَ جِيرَانِي فِي المُنَاسَبَاتِ البَرِيطَانِيَّةِ.</a:t>
@@ -26345,6 +26541,7 @@
                   <a:srgbClr val="1B3B6F"/>
                 </a:solidFill>
                 <a:latin typeface="Amiri" pitchFamily="2" charset="-78"/>
+                <a:ea typeface="Amiri" pitchFamily="2" charset="-78"/>
                 <a:cs typeface="Amiri" pitchFamily="2" charset="-78"/>
               </a:rPr>
               <a:t>هَلْ يُمْكِنُ أَنْ يَحْتَفِلَ الإِنْسَانُ بِيَوْمَيْنِ وَطَنِيَّيْنِ؟</a:t>
@@ -26554,6 +26751,7 @@
                   <a:srgbClr val="D4AF37"/>
                 </a:solidFill>
                 <a:latin typeface="Amiri" pitchFamily="2" charset="-78"/>
+                <a:ea typeface="Amiri" pitchFamily="2" charset="-78"/>
                 <a:cs typeface="Amiri" pitchFamily="2" charset="-78"/>
               </a:rPr>
               <a:t>م</a:t>
@@ -26874,6 +27072,7 @@
                   <a:srgbClr val="8A6D1E"/>
                 </a:solidFill>
                 <a:latin typeface="Amiri" pitchFamily="2" charset="-78"/>
+                <a:ea typeface="Amiri" pitchFamily="2" charset="-78"/>
                 <a:cs typeface="Amiri" pitchFamily="2" charset="-78"/>
               </a:rPr>
               <a:t>نَمُوذَجُ الإِجَابَةِ</a:t>
@@ -27116,6 +27315,7 @@
                   <a:srgbClr val="1B3B6F"/>
                 </a:solidFill>
                 <a:latin typeface="Amiri" pitchFamily="2" charset="-78"/>
+                <a:ea typeface="Amiri" pitchFamily="2" charset="-78"/>
                 <a:cs typeface="Amiri" pitchFamily="2" charset="-78"/>
               </a:rPr>
               <a:t>الفَخْرُ أَنْ تُحِبَّ وَطَنَكَ وَتَخْدُمَهُ، أَمَّا التَّعَصُّبُ فَأَنْ تَحْتَقِرَ أَوْطَانَ الآخَرِينَ؛ الأَوَّلُ يَبْنِي، وَالثَّانِي يَهْدِمُ.</a:t>
@@ -27192,6 +27392,7 @@
                   <a:srgbClr val="1B3B6F"/>
                 </a:solidFill>
                 <a:latin typeface="Amiri" pitchFamily="2" charset="-78"/>
+                <a:ea typeface="Amiri" pitchFamily="2" charset="-78"/>
                 <a:cs typeface="Amiri" pitchFamily="2" charset="-78"/>
               </a:rPr>
               <a:t>مَا الفَرْقُ بَيْنَ الفَخْرِ الوَطَنِيِّ وَالتَّعَصُّبِ؟</a:t>
@@ -27295,6 +27496,7 @@
                   <a:srgbClr val="1B3B6F"/>
                 </a:solidFill>
                 <a:latin typeface="Amiri" pitchFamily="2" charset="-78"/>
+                <a:ea typeface="Amiri" pitchFamily="2" charset="-78"/>
                 <a:cs typeface="Amiri" pitchFamily="2" charset="-78"/>
               </a:rPr>
               <a:t>لَوِ اخْتَرَعْتُهُ، لَسَمَّيْتُهُ "عِيدَ الجِيرَانِ"، تُغْلَقُ فِيهِ الشَّوَارِعُ أَمَامَ السَّيَّارَاتِ، وَتُوضَعُ فِيهَا مَوَائِدُ طَوِيلَةٌ، وَيُحْضِرُ كُلُّ بَيْتٍ طَبَقًا مِنْ بَلَدِ أَصْلِهِ.</a:t>
@@ -27371,6 +27573,7 @@
                   <a:srgbClr val="1B3B6F"/>
                 </a:solidFill>
                 <a:latin typeface="Amiri" pitchFamily="2" charset="-78"/>
+                <a:ea typeface="Amiri" pitchFamily="2" charset="-78"/>
                 <a:cs typeface="Amiri" pitchFamily="2" charset="-78"/>
               </a:rPr>
               <a:t>لَوْ اخْتَرَعْتَ عِيدًا جَدِيدًا لِمَدِينَتِكَ، كَيْفَ يَكُونُ؟</a:t>
@@ -27580,6 +27783,7 @@
                   <a:srgbClr val="D4AF37"/>
                 </a:solidFill>
                 <a:latin typeface="Amiri" pitchFamily="2" charset="-78"/>
+                <a:ea typeface="Amiri" pitchFamily="2" charset="-78"/>
                 <a:cs typeface="Amiri" pitchFamily="2" charset="-78"/>
               </a:rPr>
               <a:t>م</a:t>
@@ -27900,6 +28104,7 @@
                   <a:srgbClr val="8A6D1E"/>
                 </a:solidFill>
                 <a:latin typeface="Amiri" pitchFamily="2" charset="-78"/>
+                <a:ea typeface="Amiri" pitchFamily="2" charset="-78"/>
                 <a:cs typeface="Amiri" pitchFamily="2" charset="-78"/>
               </a:rPr>
               <a:t>قَيِّمْ عَمَلَكَ</a:t>
@@ -29144,6 +29349,7 @@
                   <a:srgbClr val="FFFFFF"/>
                 </a:solidFill>
                 <a:latin typeface="Amiri" pitchFamily="2" charset="-78"/>
+                <a:ea typeface="Amiri" pitchFamily="2" charset="-78"/>
                 <a:cs typeface="Amiri" pitchFamily="2" charset="-78"/>
               </a:rPr>
               <a:t>أَحْسَنْتُمْ! إِلَى اللِّقَاءِ</a:t>
@@ -29296,6 +29502,7 @@
                   <a:srgbClr val="D4AF37"/>
                 </a:solidFill>
                 <a:latin typeface="Amiri" pitchFamily="2" charset="-78"/>
+                <a:ea typeface="Amiri" pitchFamily="2" charset="-78"/>
                 <a:cs typeface="Amiri" pitchFamily="2" charset="-78"/>
               </a:rPr>
               <a:t>وَرْشَةُ الكِتَابَةِ</a:t>
@@ -29429,6 +29636,7 @@
                   <a:srgbClr val="D4AF37"/>
                 </a:solidFill>
                 <a:latin typeface="Amiri" pitchFamily="2" charset="-78"/>
+                <a:ea typeface="Amiri" pitchFamily="2" charset="-78"/>
                 <a:cs typeface="Amiri" pitchFamily="2" charset="-78"/>
               </a:rPr>
               <a:t>م</a:t>
@@ -29749,6 +29957,7 @@
                   <a:srgbClr val="8A6D1E"/>
                 </a:solidFill>
                 <a:latin typeface="Amiri" pitchFamily="2" charset="-78"/>
+                <a:ea typeface="Amiri" pitchFamily="2" charset="-78"/>
                 <a:cs typeface="Amiri" pitchFamily="2" charset="-78"/>
               </a:rPr>
               <a:t>خَرِيطَةُ الوَرْشَةِ</a:t>
@@ -30063,6 +30272,7 @@
                   <a:srgbClr val="1B3B6F"/>
                 </a:solidFill>
                 <a:latin typeface="Amiri" pitchFamily="2" charset="-78"/>
+                <a:ea typeface="Amiri" pitchFamily="2" charset="-78"/>
                 <a:cs typeface="Amiri" pitchFamily="2" charset="-78"/>
               </a:rPr>
               <a:t>كَيْفَ</a:t>
@@ -30339,6 +30549,7 @@
                   <a:srgbClr val="1E6B52"/>
                 </a:solidFill>
                 <a:latin typeface="Amiri" pitchFamily="2" charset="-78"/>
+                <a:ea typeface="Amiri" pitchFamily="2" charset="-78"/>
                 <a:cs typeface="Amiri" pitchFamily="2" charset="-78"/>
               </a:rPr>
               <a:t>تَمْثِيلُ الدَّوْرِ</a:t>
@@ -30615,6 +30826,7 @@
                   <a:srgbClr val="8A6D1E"/>
                 </a:solidFill>
                 <a:latin typeface="Amiri" pitchFamily="2" charset="-78"/>
+                <a:ea typeface="Amiri" pitchFamily="2" charset="-78"/>
                 <a:cs typeface="Amiri" pitchFamily="2" charset="-78"/>
               </a:rPr>
               <a:t>النَّمُوذَجُ</a:t>
@@ -30891,6 +31103,7 @@
                   <a:srgbClr val="1E6B52"/>
                 </a:solidFill>
                 <a:latin typeface="Amiri" pitchFamily="2" charset="-78"/>
+                <a:ea typeface="Amiri" pitchFamily="2" charset="-78"/>
                 <a:cs typeface="Amiri" pitchFamily="2" charset="-78"/>
               </a:rPr>
               <a:t>المُحَادَثَةُ</a:t>
@@ -31167,6 +31380,7 @@
                   <a:srgbClr val="8A6D1E"/>
                 </a:solidFill>
                 <a:latin typeface="Amiri" pitchFamily="2" charset="-78"/>
+                <a:ea typeface="Amiri" pitchFamily="2" charset="-78"/>
                 <a:cs typeface="Amiri" pitchFamily="2" charset="-78"/>
               </a:rPr>
               <a:t>قَيِّمْ</a:t>
@@ -31410,6 +31624,7 @@
                   <a:srgbClr val="D4AF37"/>
                 </a:solidFill>
                 <a:latin typeface="Amiri" pitchFamily="2" charset="-78"/>
+                <a:ea typeface="Amiri" pitchFamily="2" charset="-78"/>
                 <a:cs typeface="Amiri" pitchFamily="2" charset="-78"/>
               </a:rPr>
               <a:t>م</a:t>
@@ -31730,6 +31945,7 @@
                   <a:srgbClr val="8A6D1E"/>
                 </a:solidFill>
                 <a:latin typeface="Amiri" pitchFamily="2" charset="-78"/>
+                <a:ea typeface="Amiri" pitchFamily="2" charset="-78"/>
                 <a:cs typeface="Amiri" pitchFamily="2" charset="-78"/>
               </a:rPr>
               <a:t>امْتِحَانُ التَّحَدُّثِ</a:t>
@@ -32354,6 +32570,7 @@
                   <a:srgbClr val="1B3B6F"/>
                 </a:solidFill>
                 <a:latin typeface="Amiri" pitchFamily="2" charset="-78"/>
+                <a:ea typeface="Amiri" pitchFamily="2" charset="-78"/>
                 <a:cs typeface="Amiri" pitchFamily="2" charset="-78"/>
               </a:rPr>
               <a:t>عَفْوًا، هَلْ يُمْكِنُ أَنْ تُعِيدَ السُّؤَالَ؟</a:t>
@@ -32453,6 +32670,7 @@
                   <a:srgbClr val="1B3B6F"/>
                 </a:solidFill>
                 <a:latin typeface="Amiri" pitchFamily="2" charset="-78"/>
+                <a:ea typeface="Amiri" pitchFamily="2" charset="-78"/>
                 <a:cs typeface="Amiri" pitchFamily="2" charset="-78"/>
               </a:rPr>
               <a:t>لَحْظَةً، دَعْنِي أُفَكِّرُ …</a:t>
@@ -32552,6 +32770,7 @@
                   <a:srgbClr val="1B3B6F"/>
                 </a:solidFill>
                 <a:latin typeface="Amiri" pitchFamily="2" charset="-78"/>
+                <a:ea typeface="Amiri" pitchFamily="2" charset="-78"/>
                 <a:cs typeface="Amiri" pitchFamily="2" charset="-78"/>
               </a:rPr>
               <a:t>أَقْصِدُ …</a:t>
@@ -32723,6 +32942,7 @@
                   <a:srgbClr val="D4AF37"/>
                 </a:solidFill>
                 <a:latin typeface="Amiri" pitchFamily="2" charset="-78"/>
+                <a:ea typeface="Amiri" pitchFamily="2" charset="-78"/>
                 <a:cs typeface="Amiri" pitchFamily="2" charset="-78"/>
               </a:rPr>
               <a:t>م</a:t>
@@ -33043,6 +33263,7 @@
                   <a:srgbClr val="8A6D1E"/>
                 </a:solidFill>
                 <a:latin typeface="Amiri" pitchFamily="2" charset="-78"/>
+                <a:ea typeface="Amiri" pitchFamily="2" charset="-78"/>
                 <a:cs typeface="Amiri" pitchFamily="2" charset="-78"/>
               </a:rPr>
               <a:t>المَبْنِيُّ لِلْمَجْهُولِ</a:t>
@@ -33346,6 +33567,7 @@
                   <a:srgbClr val="1B3B6F"/>
                 </a:solidFill>
                 <a:latin typeface="Amiri" pitchFamily="2" charset="-78"/>
+                <a:ea typeface="Amiri" pitchFamily="2" charset="-78"/>
                 <a:cs typeface="Amiri" pitchFamily="2" charset="-78"/>
               </a:rPr>
               <a:t>اليَوْمُ الوَطَنِيُّ</a:t>
@@ -33503,6 +33725,7 @@
                   <a:srgbClr val="1B3B6F"/>
                 </a:solidFill>
                 <a:latin typeface="Amiri" pitchFamily="2" charset="-78"/>
+                <a:ea typeface="Amiri" pitchFamily="2" charset="-78"/>
                 <a:cs typeface="Amiri" pitchFamily="2" charset="-78"/>
               </a:rPr>
               <a:t>وَطَنِيَّةٌ</a:t>
@@ -33606,6 +33829,7 @@
                   <a:srgbClr val="1B3B6F"/>
                 </a:solidFill>
                 <a:latin typeface="Amiri" pitchFamily="2" charset="-78"/>
+                <a:ea typeface="Amiri" pitchFamily="2" charset="-78"/>
                 <a:cs typeface="Amiri" pitchFamily="2" charset="-78"/>
               </a:rPr>
               <a:t>عِيدُ الاسْتِقْلَالِ</a:t>
@@ -33871,6 +34095,7 @@
                   <a:srgbClr val="1B3B6F"/>
                 </a:solidFill>
                 <a:latin typeface="Amiri" pitchFamily="2" charset="-78"/>
+                <a:ea typeface="Amiri" pitchFamily="2" charset="-78"/>
                 <a:cs typeface="Amiri" pitchFamily="2" charset="-78"/>
               </a:rPr>
               <a:t>تَقْلِيدٌ شَعْبِيٌّ</a:t>
@@ -34028,6 +34253,7 @@
                   <a:srgbClr val="1B3B6F"/>
                 </a:solidFill>
                 <a:latin typeface="Amiri" pitchFamily="2" charset="-78"/>
+                <a:ea typeface="Amiri" pitchFamily="2" charset="-78"/>
                 <a:cs typeface="Amiri" pitchFamily="2" charset="-78"/>
               </a:rPr>
               <a:t>تُرَاثٌ</a:t>
@@ -34131,6 +34357,7 @@
                   <a:srgbClr val="1B3B6F"/>
                 </a:solidFill>
                 <a:latin typeface="Amiri" pitchFamily="2" charset="-78"/>
+                <a:ea typeface="Amiri" pitchFamily="2" charset="-78"/>
                 <a:cs typeface="Amiri" pitchFamily="2" charset="-78"/>
               </a:rPr>
               <a:t>تَقَالِيدُ</a:t>
@@ -34396,6 +34623,7 @@
                   <a:srgbClr val="1B3B6F"/>
                 </a:solidFill>
                 <a:latin typeface="Amiri" pitchFamily="2" charset="-78"/>
+                <a:ea typeface="Amiri" pitchFamily="2" charset="-78"/>
                 <a:cs typeface="Amiri" pitchFamily="2" charset="-78"/>
               </a:rPr>
               <a:t>يُحْتَفَلُ بِهِ</a:t>
@@ -34553,6 +34781,7 @@
                   <a:srgbClr val="1B3B6F"/>
                 </a:solidFill>
                 <a:latin typeface="Amiri" pitchFamily="2" charset="-78"/>
+                <a:ea typeface="Amiri" pitchFamily="2" charset="-78"/>
                 <a:cs typeface="Amiri" pitchFamily="2" charset="-78"/>
               </a:rPr>
               <a:t>نَحْتَفِلُ</a:t>
@@ -34656,6 +34885,7 @@
                   <a:srgbClr val="1B3B6F"/>
                 </a:solidFill>
                 <a:latin typeface="Amiri" pitchFamily="2" charset="-78"/>
+                <a:ea typeface="Amiri" pitchFamily="2" charset="-78"/>
                 <a:cs typeface="Amiri" pitchFamily="2" charset="-78"/>
               </a:rPr>
               <a:t>يُحْتَفَلُ بِهَا</a:t>
@@ -34921,6 +35151,7 @@
                   <a:srgbClr val="1B3B6F"/>
                 </a:solidFill>
                 <a:latin typeface="Amiri" pitchFamily="2" charset="-78"/>
+                <a:ea typeface="Amiri" pitchFamily="2" charset="-78"/>
                 <a:cs typeface="Amiri" pitchFamily="2" charset="-78"/>
               </a:rPr>
               <a:t>تُرْفَعُ الأَعْلَامُ</a:t>
@@ -35078,6 +35309,7 @@
                   <a:srgbClr val="1B3B6F"/>
                 </a:solidFill>
                 <a:latin typeface="Amiri" pitchFamily="2" charset="-78"/>
+                <a:ea typeface="Amiri" pitchFamily="2" charset="-78"/>
                 <a:cs typeface="Amiri" pitchFamily="2" charset="-78"/>
               </a:rPr>
               <a:t>نَرْفَعُ</a:t>
@@ -35181,6 +35413,7 @@
                   <a:srgbClr val="1B3B6F"/>
                 </a:solidFill>
                 <a:latin typeface="Amiri" pitchFamily="2" charset="-78"/>
+                <a:ea typeface="Amiri" pitchFamily="2" charset="-78"/>
                 <a:cs typeface="Amiri" pitchFamily="2" charset="-78"/>
               </a:rPr>
               <a:t>عَلَمٌ</a:t>
@@ -35446,6 +35679,7 @@
                   <a:srgbClr val="1B3B6F"/>
                 </a:solidFill>
                 <a:latin typeface="Amiri" pitchFamily="2" charset="-78"/>
+                <a:ea typeface="Amiri" pitchFamily="2" charset="-78"/>
                 <a:cs typeface="Amiri" pitchFamily="2" charset="-78"/>
               </a:rPr>
               <a:t>تُطْلَقُ الأَلْعَابُ النَّارِيَّةُ</a:t>
@@ -35603,6 +35837,7 @@
                   <a:srgbClr val="1B3B6F"/>
                 </a:solidFill>
                 <a:latin typeface="Amiri" pitchFamily="2" charset="-78"/>
+                <a:ea typeface="Amiri" pitchFamily="2" charset="-78"/>
                 <a:cs typeface="Amiri" pitchFamily="2" charset="-78"/>
               </a:rPr>
               <a:t>نَارٌ كَبِيرَةٌ</a:t>
@@ -35706,6 +35941,7 @@
                   <a:srgbClr val="1B3B6F"/>
                 </a:solidFill>
                 <a:latin typeface="Amiri" pitchFamily="2" charset="-78"/>
+                <a:ea typeface="Amiri" pitchFamily="2" charset="-78"/>
                 <a:cs typeface="Amiri" pitchFamily="2" charset="-78"/>
               </a:rPr>
               <a:t>أَلْعَابٌ نَارِيَّةٌ</a:t>
@@ -35971,6 +36207,7 @@
                   <a:srgbClr val="1B3B6F"/>
                 </a:solidFill>
                 <a:latin typeface="Amiri" pitchFamily="2" charset="-78"/>
+                <a:ea typeface="Amiri" pitchFamily="2" charset="-78"/>
                 <a:cs typeface="Amiri" pitchFamily="2" charset="-78"/>
               </a:rPr>
               <a:t>تُزَيَّنُ الشَّوَارِعُ</a:t>
@@ -36128,6 +36365,7 @@
                   <a:srgbClr val="1B3B6F"/>
                 </a:solidFill>
                 <a:latin typeface="Amiri" pitchFamily="2" charset="-78"/>
+                <a:ea typeface="Amiri" pitchFamily="2" charset="-78"/>
                 <a:cs typeface="Amiri" pitchFamily="2" charset="-78"/>
               </a:rPr>
               <a:t>أَضْوَاءٌ</a:t>
@@ -36231,6 +36469,7 @@
                   <a:srgbClr val="1B3B6F"/>
                 </a:solidFill>
                 <a:latin typeface="Amiri" pitchFamily="2" charset="-78"/>
+                <a:ea typeface="Amiri" pitchFamily="2" charset="-78"/>
                 <a:cs typeface="Amiri" pitchFamily="2" charset="-78"/>
               </a:rPr>
               <a:t>زِينَةٌ</a:t>
@@ -36364,6 +36603,7 @@
                   <a:srgbClr val="D4AF37"/>
                 </a:solidFill>
                 <a:latin typeface="Amiri" pitchFamily="2" charset="-78"/>
+                <a:ea typeface="Amiri" pitchFamily="2" charset="-78"/>
                 <a:cs typeface="Amiri" pitchFamily="2" charset="-78"/>
               </a:rPr>
               <a:t>م</a:t>
@@ -36684,6 +36924,7 @@
                   <a:srgbClr val="8A6D1E"/>
                 </a:solidFill>
                 <a:latin typeface="Amiri" pitchFamily="2" charset="-78"/>
+                <a:ea typeface="Amiri" pitchFamily="2" charset="-78"/>
                 <a:cs typeface="Amiri" pitchFamily="2" charset="-78"/>
               </a:rPr>
               <a:t>المُقَارَنَةُ بَيْنَ الاحْتِفَالَاتِ</a:t>
@@ -36987,6 +37228,7 @@
                   <a:srgbClr val="1B3B6F"/>
                 </a:solidFill>
                 <a:latin typeface="Amiri" pitchFamily="2" charset="-78"/>
+                <a:ea typeface="Amiri" pitchFamily="2" charset="-78"/>
                 <a:cs typeface="Amiri" pitchFamily="2" charset="-78"/>
               </a:rPr>
               <a:t>اسْتِعْرَاضٌ</a:t>
@@ -37144,6 +37386,7 @@
                   <a:srgbClr val="1B3B6F"/>
                 </a:solidFill>
                 <a:latin typeface="Amiri" pitchFamily="2" charset="-78"/>
+                <a:ea typeface="Amiri" pitchFamily="2" charset="-78"/>
                 <a:cs typeface="Amiri" pitchFamily="2" charset="-78"/>
               </a:rPr>
               <a:t>كَرْنَفَالٌ</a:t>
@@ -37247,6 +37490,7 @@
                   <a:srgbClr val="1B3B6F"/>
                 </a:solidFill>
                 <a:latin typeface="Amiri" pitchFamily="2" charset="-78"/>
+                <a:ea typeface="Amiri" pitchFamily="2" charset="-78"/>
                 <a:cs typeface="Amiri" pitchFamily="2" charset="-78"/>
               </a:rPr>
               <a:t>اسْتِعْرَاضَاتٌ</a:t>
@@ -37512,6 +37756,7 @@
                   <a:srgbClr val="1B3B6F"/>
                 </a:solidFill>
                 <a:latin typeface="Amiri" pitchFamily="2" charset="-78"/>
+                <a:ea typeface="Amiri" pitchFamily="2" charset="-78"/>
                 <a:cs typeface="Amiri" pitchFamily="2" charset="-78"/>
               </a:rPr>
               <a:t>رَقْصَةٌ شَعْبِيَّةٌ</a:t>
@@ -37669,6 +37914,7 @@
                   <a:srgbClr val="1B3B6F"/>
                 </a:solidFill>
                 <a:latin typeface="Amiri" pitchFamily="2" charset="-78"/>
+                <a:ea typeface="Amiri" pitchFamily="2" charset="-78"/>
                 <a:cs typeface="Amiri" pitchFamily="2" charset="-78"/>
               </a:rPr>
               <a:t>العَرْضَةُ</a:t>
@@ -37772,6 +38018,7 @@
                   <a:srgbClr val="1B3B6F"/>
                 </a:solidFill>
                 <a:latin typeface="Amiri" pitchFamily="2" charset="-78"/>
+                <a:ea typeface="Amiri" pitchFamily="2" charset="-78"/>
                 <a:cs typeface="Amiri" pitchFamily="2" charset="-78"/>
               </a:rPr>
               <a:t>الدَّبْكَةُ</a:t>
@@ -38037,6 +38284,7 @@
                   <a:srgbClr val="1B3B6F"/>
                 </a:solidFill>
                 <a:latin typeface="Amiri" pitchFamily="2" charset="-78"/>
+                <a:ea typeface="Amiri" pitchFamily="2" charset="-78"/>
                 <a:cs typeface="Amiri" pitchFamily="2" charset="-78"/>
               </a:rPr>
               <a:t>مِهْرَجَانٌ</a:t>
@@ -38194,6 +38442,7 @@
                   <a:srgbClr val="1B3B6F"/>
                 </a:solidFill>
                 <a:latin typeface="Amiri" pitchFamily="2" charset="-78"/>
+                <a:ea typeface="Amiri" pitchFamily="2" charset="-78"/>
                 <a:cs typeface="Amiri" pitchFamily="2" charset="-78"/>
               </a:rPr>
               <a:t>شَمُّ النَّسِيمِ</a:t>
@@ -38297,6 +38546,7 @@
                   <a:srgbClr val="1B3B6F"/>
                 </a:solidFill>
                 <a:latin typeface="Amiri" pitchFamily="2" charset="-78"/>
+                <a:ea typeface="Amiri" pitchFamily="2" charset="-78"/>
                 <a:cs typeface="Amiri" pitchFamily="2" charset="-78"/>
               </a:rPr>
               <a:t>مِهْرَجَانَاتٌ</a:t>
@@ -38562,6 +38812,7 @@
                   <a:srgbClr val="1B3B6F"/>
                 </a:solidFill>
                 <a:latin typeface="Amiri" pitchFamily="2" charset="-78"/>
+                <a:ea typeface="Amiri" pitchFamily="2" charset="-78"/>
                 <a:cs typeface="Amiri" pitchFamily="2" charset="-78"/>
               </a:rPr>
               <a:t>أَكْبَرُ مِنْ</a:t>
@@ -38719,6 +38970,7 @@
                   <a:srgbClr val="1B3B6F"/>
                 </a:solidFill>
                 <a:latin typeface="Amiri" pitchFamily="2" charset="-78"/>
+                <a:ea typeface="Amiri" pitchFamily="2" charset="-78"/>
                 <a:cs typeface="Amiri" pitchFamily="2" charset="-78"/>
               </a:rPr>
               <a:t>أَكْبَرُ … فِي</a:t>
@@ -38822,6 +39074,7 @@
                   <a:srgbClr val="1B3B6F"/>
                 </a:solidFill>
                 <a:latin typeface="Amiri" pitchFamily="2" charset="-78"/>
+                <a:ea typeface="Amiri" pitchFamily="2" charset="-78"/>
                 <a:cs typeface="Amiri" pitchFamily="2" charset="-78"/>
               </a:rPr>
               <a:t>أَكْثَرُ حَمَاسًا مِنْ</a:t>
@@ -39087,6 +39340,7 @@
                   <a:srgbClr val="1B3B6F"/>
                 </a:solidFill>
                 <a:latin typeface="Amiri" pitchFamily="2" charset="-78"/>
+                <a:ea typeface="Amiri" pitchFamily="2" charset="-78"/>
                 <a:cs typeface="Amiri" pitchFamily="2" charset="-78"/>
               </a:rPr>
               <a:t>يَعُودُ إِلَى</a:t>
@@ -39244,6 +39498,7 @@
                   <a:srgbClr val="1B3B6F"/>
                 </a:solidFill>
                 <a:latin typeface="Amiri" pitchFamily="2" charset="-78"/>
+                <a:ea typeface="Amiri" pitchFamily="2" charset="-78"/>
                 <a:cs typeface="Amiri" pitchFamily="2" charset="-78"/>
               </a:rPr>
               <a:t>قَرْنٌ</a:t>
@@ -39347,6 +39602,7 @@
                   <a:srgbClr val="1B3B6F"/>
                 </a:solidFill>
                 <a:latin typeface="Amiri" pitchFamily="2" charset="-78"/>
+                <a:ea typeface="Amiri" pitchFamily="2" charset="-78"/>
                 <a:cs typeface="Amiri" pitchFamily="2" charset="-78"/>
               </a:rPr>
               <a:t>مُنْذُ</a:t>
@@ -39612,6 +39868,7 @@
                   <a:srgbClr val="1B3B6F"/>
                 </a:solidFill>
                 <a:latin typeface="Amiri" pitchFamily="2" charset="-78"/>
+                <a:ea typeface="Amiri" pitchFamily="2" charset="-78"/>
                 <a:cs typeface="Amiri" pitchFamily="2" charset="-78"/>
               </a:rPr>
               <a:t>فَخْرٌ وَطَنِيٌّ</a:t>
@@ -39769,6 +40026,7 @@
                   <a:srgbClr val="1B3B6F"/>
                 </a:solidFill>
                 <a:latin typeface="Amiri" pitchFamily="2" charset="-78"/>
+                <a:ea typeface="Amiri" pitchFamily="2" charset="-78"/>
                 <a:cs typeface="Amiri" pitchFamily="2" charset="-78"/>
               </a:rPr>
               <a:t>الانْتِمَاءُ</a:t>
@@ -39872,6 +40130,7 @@
                   <a:srgbClr val="1B3B6F"/>
                 </a:solidFill>
                 <a:latin typeface="Amiri" pitchFamily="2" charset="-78"/>
+                <a:ea typeface="Amiri" pitchFamily="2" charset="-78"/>
                 <a:cs typeface="Amiri" pitchFamily="2" charset="-78"/>
               </a:rPr>
               <a:t>فَخُورٌ · فَخُورَةٌ</a:t>
@@ -40005,6 +40264,7 @@
                   <a:srgbClr val="D4AF37"/>
                 </a:solidFill>
                 <a:latin typeface="Amiri" pitchFamily="2" charset="-78"/>
+                <a:ea typeface="Amiri" pitchFamily="2" charset="-78"/>
                 <a:cs typeface="Amiri" pitchFamily="2" charset="-78"/>
               </a:rPr>
               <a:t>م</a:t>
@@ -40325,6 +40585,7 @@
                   <a:srgbClr val="8A6D1E"/>
                 </a:solidFill>
                 <a:latin typeface="Amiri" pitchFamily="2" charset="-78"/>
+                <a:ea typeface="Amiri" pitchFamily="2" charset="-78"/>
                 <a:cs typeface="Amiri" pitchFamily="2" charset="-78"/>
               </a:rPr>
               <a:t>فِي الغُرَفِ</a:t>
@@ -41501,6 +41762,7 @@
                   <a:srgbClr val="1B3B6F"/>
                 </a:solidFill>
                 <a:latin typeface="Amiri" pitchFamily="2" charset="-78"/>
+                <a:ea typeface="Amiri" pitchFamily="2" charset="-78"/>
                 <a:cs typeface="Amiri" pitchFamily="2" charset="-78"/>
               </a:rPr>
               <a:t>دَوْرُكَ!</a:t>
@@ -41577,6 +41839,7 @@
                   <a:srgbClr val="1B3B6F"/>
                 </a:solidFill>
                 <a:latin typeface="Amiri" pitchFamily="2" charset="-78"/>
+                <a:ea typeface="Amiri" pitchFamily="2" charset="-78"/>
                 <a:cs typeface="Amiri" pitchFamily="2" charset="-78"/>
               </a:rPr>
               <a:t>أَحْسَنْتَ! / أَحْسَنْتِ!</a:t>
@@ -41653,6 +41916,7 @@
                   <a:srgbClr val="1B3B6F"/>
                 </a:solidFill>
                 <a:latin typeface="Amiri" pitchFamily="2" charset="-78"/>
+                <a:ea typeface="Amiri" pitchFamily="2" charset="-78"/>
                 <a:cs typeface="Amiri" pitchFamily="2" charset="-78"/>
               </a:rPr>
               <a:t>تَكَلَّمْ أَكْثَرَ، مِنْ فَضْلِكَ</a:t>
@@ -41729,6 +41993,7 @@
                   <a:srgbClr val="1B3B6F"/>
                 </a:solidFill>
                 <a:latin typeface="Amiri" pitchFamily="2" charset="-78"/>
+                <a:ea typeface="Amiri" pitchFamily="2" charset="-78"/>
                 <a:cs typeface="Amiri" pitchFamily="2" charset="-78"/>
               </a:rPr>
               <a:t>لِمَاذَا؟</a:t>
@@ -41900,6 +42165,7 @@
                   <a:srgbClr val="D4AF37"/>
                 </a:solidFill>
                 <a:latin typeface="Amiri" pitchFamily="2" charset="-78"/>
+                <a:ea typeface="Amiri" pitchFamily="2" charset="-78"/>
                 <a:cs typeface="Amiri" pitchFamily="2" charset="-78"/>
               </a:rPr>
               <a:t>م</a:t>
@@ -42220,6 +42486,7 @@
                   <a:srgbClr val="8A6D1E"/>
                 </a:solidFill>
                 <a:latin typeface="Amiri" pitchFamily="2" charset="-78"/>
+                <a:ea typeface="Amiri" pitchFamily="2" charset="-78"/>
                 <a:cs typeface="Amiri" pitchFamily="2" charset="-78"/>
               </a:rPr>
               <a:t>اليَوْمُ الوَطَنِيُّ فِي عُمَانَ</a:t>
@@ -42500,6 +42767,7 @@
                   <a:srgbClr val="1B3B6F"/>
                 </a:solidFill>
                 <a:latin typeface="Amiri" pitchFamily="2" charset="-78"/>
+                <a:ea typeface="Amiri" pitchFamily="2" charset="-78"/>
                 <a:cs typeface="Amiri" pitchFamily="2" charset="-78"/>
               </a:rPr>
               <a:t>أَنَا مِنْ …</a:t>
@@ -42576,6 +42844,7 @@
                   <a:srgbClr val="1B3B6F"/>
                 </a:solidFill>
                 <a:latin typeface="Amiri" pitchFamily="2" charset="-78"/>
+                <a:ea typeface="Amiri" pitchFamily="2" charset="-78"/>
                 <a:cs typeface="Amiri" pitchFamily="2" charset="-78"/>
               </a:rPr>
               <a:t>أَهْلًا! مِنْ أَيْنَ أَنْتَ؟</a:t>
@@ -42744,6 +43013,7 @@
                   <a:srgbClr val="1B3B6F"/>
                 </a:solidFill>
                 <a:latin typeface="Amiri" pitchFamily="2" charset="-78"/>
+                <a:ea typeface="Amiri" pitchFamily="2" charset="-78"/>
                 <a:cs typeface="Amiri" pitchFamily="2" charset="-78"/>
               </a:rPr>
               <a:t>مَاذَا يَحْدُثُ …؟</a:t>
@@ -42820,6 +43090,7 @@
                   <a:srgbClr val="1B3B6F"/>
                 </a:solidFill>
                 <a:latin typeface="Amiri" pitchFamily="2" charset="-78"/>
+                <a:ea typeface="Amiri" pitchFamily="2" charset="-78"/>
                 <a:cs typeface="Amiri" pitchFamily="2" charset="-78"/>
               </a:rPr>
               <a:t>جِئْتَ فِي وَقْتٍ جَمِيلٍ! غَدًا اليَوْمُ الوَطَنِيُّ.</a:t>
@@ -42988,6 +43259,7 @@
                   <a:srgbClr val="1B3B6F"/>
                 </a:solidFill>
                 <a:latin typeface="Amiri" pitchFamily="2" charset="-78"/>
+                <a:ea typeface="Amiri" pitchFamily="2" charset="-78"/>
                 <a:cs typeface="Amiri" pitchFamily="2" charset="-78"/>
               </a:rPr>
               <a:t>مَتَى …؟</a:t>
@@ -43064,6 +43336,7 @@
                   <a:srgbClr val="1B3B6F"/>
                 </a:solidFill>
                 <a:latin typeface="Amiri" pitchFamily="2" charset="-78"/>
+                <a:ea typeface="Amiri" pitchFamily="2" charset="-78"/>
                 <a:cs typeface="Amiri" pitchFamily="2" charset="-78"/>
               </a:rPr>
               <a:t>تُرْفَعُ الأَعْلَامُ، وَتُطْلَقُ الأَلْعَابُ النَّارِيَّةُ.</a:t>
@@ -43232,6 +43505,7 @@
                   <a:srgbClr val="1B3B6F"/>
                 </a:solidFill>
                 <a:latin typeface="Amiri" pitchFamily="2" charset="-78"/>
+                <a:ea typeface="Amiri" pitchFamily="2" charset="-78"/>
                 <a:cs typeface="Amiri" pitchFamily="2" charset="-78"/>
               </a:rPr>
               <a:t>سَأَذْهَبُ … مَعَ …</a:t>
@@ -43308,6 +43582,7 @@
                   <a:srgbClr val="1B3B6F"/>
                 </a:solidFill>
                 <a:latin typeface="Amiri" pitchFamily="2" charset="-78"/>
+                <a:ea typeface="Amiri" pitchFamily="2" charset="-78"/>
                 <a:cs typeface="Amiri" pitchFamily="2" charset="-78"/>
               </a:rPr>
               <a:t>فِي السَّاعَةِ التَّاسِعَةِ عَلَى الشَّاطِئِ.</a:t>
@@ -43476,6 +43751,7 @@
                   <a:srgbClr val="1B3B6F"/>
                 </a:solidFill>
                 <a:latin typeface="Amiri" pitchFamily="2" charset="-78"/>
+                <a:ea typeface="Amiri" pitchFamily="2" charset="-78"/>
                 <a:cs typeface="Amiri" pitchFamily="2" charset="-78"/>
               </a:rPr>
               <a:t>لَيْسَ عِنْدَنَا … لٰكِنْ …</a:t>
@@ -43552,6 +43828,7 @@
                   <a:srgbClr val="1B3B6F"/>
                 </a:solidFill>
                 <a:latin typeface="Amiri" pitchFamily="2" charset="-78"/>
+                <a:ea typeface="Amiri" pitchFamily="2" charset="-78"/>
                 <a:cs typeface="Amiri" pitchFamily="2" charset="-78"/>
               </a:rPr>
               <a:t>هَلْ عِنْدَكُمْ يَوْمٌ وَطَنِيٌّ فِي بَرِيطَانْيَا؟</a:t>
@@ -43826,6 +44103,7 @@
                   <a:srgbClr val="D4AF37"/>
                 </a:solidFill>
                 <a:latin typeface="Amiri" pitchFamily="2" charset="-78"/>
+                <a:ea typeface="Amiri" pitchFamily="2" charset="-78"/>
                 <a:cs typeface="Amiri" pitchFamily="2" charset="-78"/>
               </a:rPr>
               <a:t>م</a:t>
@@ -44146,6 +44424,7 @@
                   <a:srgbClr val="8A6D1E"/>
                 </a:solidFill>
                 <a:latin typeface="Amiri" pitchFamily="2" charset="-78"/>
+                <a:ea typeface="Amiri" pitchFamily="2" charset="-78"/>
                 <a:cs typeface="Amiri" pitchFamily="2" charset="-78"/>
               </a:rPr>
               <a:t>لَيْلَةُ الأَلْعَابِ النَّارِيَّةِ</a:t>
@@ -44426,6 +44705,7 @@
                   <a:srgbClr val="1B3B6F"/>
                 </a:solidFill>
                 <a:latin typeface="Amiri" pitchFamily="2" charset="-78"/>
+                <a:ea typeface="Amiri" pitchFamily="2" charset="-78"/>
                 <a:cs typeface="Amiri" pitchFamily="2" charset="-78"/>
               </a:rPr>
               <a:t>لِأَنَّهَا … ؛ يُحْتَفَلُ بِهَا فِي …</a:t>
@@ -44502,6 +44782,7 @@
                   <a:srgbClr val="1B3B6F"/>
                 </a:solidFill>
                 <a:latin typeface="Amiri" pitchFamily="2" charset="-78"/>
+                <a:ea typeface="Amiri" pitchFamily="2" charset="-78"/>
                 <a:cs typeface="Amiri" pitchFamily="2" charset="-78"/>
               </a:rPr>
               <a:t>لِمَاذَا يُطْلِقُ النَّاسُ الأَلْعَابَ النَّارِيَّةَ اللَّيْلَةَ؟</a:t>
@@ -44670,6 +44951,7 @@
                   <a:srgbClr val="1B3B6F"/>
                 </a:solidFill>
                 <a:latin typeface="Amiri" pitchFamily="2" charset="-78"/>
+                <a:ea typeface="Amiri" pitchFamily="2" charset="-78"/>
                 <a:cs typeface="Amiri" pitchFamily="2" charset="-78"/>
               </a:rPr>
               <a:t>تُشْعَلُ … وَيُؤْكَلُ …</a:t>
@@ -44746,6 +45028,7 @@
                   <a:srgbClr val="1B3B6F"/>
                 </a:solidFill>
                 <a:latin typeface="Amiri" pitchFamily="2" charset="-78"/>
+                <a:ea typeface="Amiri" pitchFamily="2" charset="-78"/>
                 <a:cs typeface="Amiri" pitchFamily="2" charset="-78"/>
               </a:rPr>
               <a:t>وَمَاذَا يَفْعَلُ النَّاسُ؟</a:t>
@@ -44914,6 +45197,7 @@
                   <a:srgbClr val="1B3B6F"/>
                 </a:solidFill>
                 <a:latin typeface="Amiri" pitchFamily="2" charset="-78"/>
+                <a:ea typeface="Amiri" pitchFamily="2" charset="-78"/>
                 <a:cs typeface="Amiri" pitchFamily="2" charset="-78"/>
               </a:rPr>
               <a:t>نَعَمْ، يَعُودُ إِلَى …</a:t>
@@ -44990,6 +45274,7 @@
                   <a:srgbClr val="1B3B6F"/>
                 </a:solidFill>
                 <a:latin typeface="Amiri" pitchFamily="2" charset="-78"/>
+                <a:ea typeface="Amiri" pitchFamily="2" charset="-78"/>
                 <a:cs typeface="Amiri" pitchFamily="2" charset="-78"/>
               </a:rPr>
               <a:t>هَلْ هُوَ تَقْلِيدٌ قَدِيمٌ؟</a:t>
@@ -45093,6 +45378,7 @@
                   <a:srgbClr val="1B3B6F"/>
                 </a:solidFill>
                 <a:latin typeface="Amiri" pitchFamily="2" charset="-78"/>
+                <a:ea typeface="Amiri" pitchFamily="2" charset="-78"/>
                 <a:cs typeface="Amiri" pitchFamily="2" charset="-78"/>
               </a:rPr>
               <a:t>مَتَى …؟ وَهَلْ …؟</a:t>
@@ -45169,6 +45455,7 @@
                   <a:srgbClr val="1B3B6F"/>
                 </a:solidFill>
                 <a:latin typeface="Amiri" pitchFamily="2" charset="-78"/>
+                <a:ea typeface="Amiri" pitchFamily="2" charset="-78"/>
                 <a:cs typeface="Amiri" pitchFamily="2" charset="-78"/>
               </a:rPr>
               <a:t>عِنْدَنَا فِي الأُرْدُنِّ عِيدُ الاسْتِقْلَالِ.</a:t>
@@ -45272,6 +45559,7 @@
                   <a:srgbClr val="1B3B6F"/>
                 </a:solidFill>
                 <a:latin typeface="Amiri" pitchFamily="2" charset="-78"/>
+                <a:ea typeface="Amiri" pitchFamily="2" charset="-78"/>
                 <a:cs typeface="Amiri" pitchFamily="2" charset="-78"/>
               </a:rPr>
               <a:t>أُفَضِّلُ … لِأَنَّهُ أَكْثَرُ … مِنْ …</a:t>
@@ -45348,6 +45636,7 @@
                   <a:srgbClr val="1B3B6F"/>
                 </a:solidFill>
                 <a:latin typeface="Amiri" pitchFamily="2" charset="-78"/>
+                <a:ea typeface="Amiri" pitchFamily="2" charset="-78"/>
                 <a:cs typeface="Amiri" pitchFamily="2" charset="-78"/>
               </a:rPr>
               <a:t>فِي أَيَّارَ، وَنَعَمْ، أَكْبَرُ بِكَثِيرٍ! أَيُّ احْتِفَالٍ تُفَضِّلُ؟</a:t>
@@ -45522,13 +45811,9 @@
     <a:fontScheme name="Office">
       <a:majorFont>
         <a:latin typeface="Calibri Light" panose="020F0302020204030204"/>
-        <a:ea typeface=""/>
-        <a:cs typeface=""/>
-        <a:font script="Jpan" typeface="游ゴシック Light"/>
-        <a:font script="Hang" typeface="맑은 고딕"/>
-        <a:font script="Hans" typeface="等线 Light"/>
-        <a:font script="Hant" typeface="新細明體"/>
-        <a:font script="Arab" typeface="Times New Roman"/>
+        <a:ea typeface="Amiri" pitchFamily="2" charset="-78"/>
+        <a:cs typeface="Amiri" pitchFamily="2" charset="-78"/>
+        <a:font script="Arab" typeface="Amiri"/>
         <a:font script="Hebr" typeface="Times New Roman"/>
         <a:font script="Thai" typeface="Angsana New"/>
         <a:font script="Ethi" typeface="Nyala"/>
@@ -45574,13 +45859,9 @@
       </a:majorFont>
       <a:minorFont>
         <a:latin typeface="Calibri" panose="020F0502020204030204"/>
-        <a:ea typeface=""/>
-        <a:cs typeface=""/>
-        <a:font script="Jpan" typeface="游ゴシック"/>
-        <a:font script="Hang" typeface="맑은 고딕"/>
-        <a:font script="Hans" typeface="等线"/>
-        <a:font script="Hant" typeface="新細明體"/>
-        <a:font script="Arab" typeface="Arial"/>
+        <a:ea typeface="Amiri" pitchFamily="2" charset="-78"/>
+        <a:cs typeface="Amiri" pitchFamily="2" charset="-78"/>
+        <a:font script="Arab" typeface="Amiri"/>
         <a:font script="Hebr" typeface="Arial"/>
         <a:font script="Thai" typeface="Cordia New"/>
         <a:font script="Ethi" typeface="Nyala"/>
